--- a/rt-workbench/docs/2026_K조선해커톤_계획서_RT판독워크벤치.pptx
+++ b/rt-workbench/docs/2026_K조선해커톤_계획서_RT판독워크벤치.pptx
@@ -1678,7 +1678,7 @@
                 <a:ea typeface="Pretendard"/>
                 <a:cs typeface="Pretendard"/>
               </a:rPr>
-              <a:t>RT 판독 워크벤치 — “판독은 자격자가, 서류는 AI가.”</a:t>
+              <a:t>RT 판독 워크벤치 · “판정은 사람이, 서류는 AI가”</a:t>
             </a:r>
           </a:p>
         </p:txBody>
@@ -1719,7 +1719,7 @@
                 <a:ea typeface="Pretendard"/>
                 <a:cs typeface="Pretendard"/>
               </a:rPr>
-              <a:t>생산 분야 · 용접부 RT(방사선투과검사) 사진을 판독하는 사람의 판정·소견서·기록 업무를 돕는, 내 PC에서 도는 소프트웨어</a:t>
+              <a:t>생산 분야 · 용접부를 X선으로 찍은 사진을 판독하는 검사자의 판정·보고서·기록 작업을 돕는, 사무실 PC에서 도는 프로그램</a:t>
             </a:r>
           </a:p>
         </p:txBody>
@@ -2445,7 +2445,7 @@
                 <a:ea typeface="Pretendard"/>
                 <a:cs typeface="Pretendard"/>
               </a:rPr>
-              <a:t>RT(방사선투과검사)는 용접부를 X선으로 찍어 속에 숨은 결함을 찾는 검사다. 국내 조선소는 2021년 기준 대부분 </a:t>
+              <a:t>RT는 용접한 자리를 X선으로 찍어 속에 숨은 흠을 찾는 검사입니다. 국내 조선소는 2021년 기준 아직 대부분 </a:t>
             </a:r>
             <a:r>
               <a:rPr sz="1280" b="1" i="0">
@@ -2467,7 +2467,7 @@
                 <a:ea typeface="Pretendard"/>
                 <a:cs typeface="Pretendard"/>
               </a:rPr>
-              <a:t>으로 찍는다[1][2]</a:t>
+              <a:t>으로 찍습니다[1][2].</a:t>
             </a:r>
           </a:p>
           <a:p>
@@ -2493,7 +2493,7 @@
                 <a:ea typeface="Pretendard"/>
                 <a:cs typeface="Pretendard"/>
               </a:rPr>
-              <a:t>한화오션(당시 대우조선해양)이 2021.07 필름 없는 디지털 RT를 개발하고 5대 선급(배의 안전 기준을 정하고 검사하는 기관: ABS·BV·DNV·KR·LR)과 승인 체계 개발 협약을 맺었지만[2], 그 뒤 얼마나 바뀌었는지는 공개 자료로 확인되지 않는다 → </a:t>
+              <a:t>한화오션(당시 대우조선해양)은 2021.07 필름 없는 디지털 RT를 내놓고, 선급 다섯 곳과 승인 체계를 함께 만들기로 했습니다[2]. 선급은 배가 안전한지 심사하고 검사하는 기관입니다. 그 뒤로 얼마나 퍼졌는지는 공개 자료로 확인되지 않아, </a:t>
             </a:r>
             <a:r>
               <a:rPr sz="1280" b="1" i="0">
@@ -2504,7 +2504,7 @@
                 <a:ea typeface="Pretendard"/>
                 <a:cs typeface="Pretendard"/>
               </a:rPr>
-              <a:t>필름과 디지털이 함께 쓰이는 과도기</a:t>
+              <a:t>필름과 디지털이 섞여 쓰이는 시기</a:t>
             </a:r>
             <a:r>
               <a:rPr sz="1280" b="0" i="0">
@@ -2515,7 +2515,7 @@
                 <a:ea typeface="Pretendard"/>
                 <a:cs typeface="Pretendard"/>
               </a:rPr>
-              <a:t>로 본다</a:t>
+              <a:t>로 봤습니다.</a:t>
             </a:r>
           </a:p>
           <a:p>
@@ -2541,7 +2541,7 @@
                 <a:ea typeface="Pretendard"/>
                 <a:cs typeface="Pretendard"/>
               </a:rPr>
-              <a:t>선급의 국제 협회 IACS는 2021.07.01 이후 건조계약 선박부터 디지털 RT를 규칙에 넣었다[3]. 2026.07.15 승인한 개정 규칙(2028.01.01 이후 건조계약 선박)은 </a:t>
+              <a:t>선급들의 국제 협회인 IACS는 2021.07.01 이후 계약한 배부터 디지털 RT를 규칙에 넣었습니다[3]. 2026.07.15 승인한 개정 규칙은 사진을 </a:t>
             </a:r>
             <a:r>
               <a:rPr sz="1280" b="1" i="0">
@@ -2552,7 +2552,7 @@
                 <a:ea typeface="Pretendard"/>
                 <a:cs typeface="Pretendard"/>
               </a:rPr>
-              <a:t>사진 전체를 100mm 구간 단위로 판독</a:t>
+              <a:t>100mm 구간 단위로 판독</a:t>
             </a:r>
             <a:r>
               <a:rPr sz="1280" b="0" i="0">
@@ -2563,7 +2563,7 @@
                 <a:ea typeface="Pretendard"/>
                 <a:cs typeface="Pretendard"/>
               </a:rPr>
-              <a:t>하도록 지침으로 명시했다[5] — 찍는 방법이 바뀌어도 </a:t>
+              <a:t>하라고 정했고, 2028.01.01 이후 계약한 배에 적용됩니다[5]. 찍는 방법이 바뀌어도 </a:t>
             </a:r>
             <a:r>
               <a:rPr sz="1280" b="1" i="0">
@@ -2574,7 +2574,18 @@
                 <a:ea typeface="Pretendard"/>
                 <a:cs typeface="Pretendard"/>
               </a:rPr>
-              <a:t>판독·판정·기록은 사람의 일</a:t>
+              <a:t>판독과 판정, 기록은 사람 몫</a:t>
+            </a:r>
+            <a:r>
+              <a:rPr sz="1280" b="0" i="0">
+                <a:solidFill>
+                  <a:srgbClr val="1F2A44"/>
+                </a:solidFill>
+                <a:latin typeface="Pretendard"/>
+                <a:ea typeface="Pretendard"/>
+                <a:cs typeface="Pretendard"/>
+              </a:rPr>
+              <a:t>입니다.</a:t>
             </a:r>
           </a:p>
           <a:p>
@@ -2600,7 +2611,7 @@
                 <a:ea typeface="Pretendard"/>
                 <a:cs typeface="Pretendard"/>
               </a:rPr>
-              <a:t>판독원(RT 사진을 판독할 자격을 가진 검사자)의 하루: 결함을 찾고 → 크기를 재서 기준과 대조하고 → 합격·불합격을 정하고 → </a:t>
+              <a:t>판독원의 하루는 이렇습니다. 흠을 찾고, 크기를 재고, 기준과 맞춰 합격인지 정한 뒤 </a:t>
             </a:r>
             <a:r>
               <a:rPr sz="1280" b="1" i="0">
@@ -2611,7 +2622,7 @@
                 <a:ea typeface="Pretendard"/>
                 <a:cs typeface="Pretendard"/>
               </a:rPr>
-              <a:t>보고서를 손으로 쓴다</a:t>
+              <a:t>보고서를 손으로 씁니다</a:t>
             </a:r>
             <a:r>
               <a:rPr sz="1280" b="0" i="0">
@@ -2622,7 +2633,7 @@
                 <a:ea typeface="Pretendard"/>
                 <a:cs typeface="Pretendard"/>
               </a:rPr>
-              <a:t>(선급 규칙 필수 항목 25개[4]) → 보관 → 선주·선급이 물으면 </a:t>
+              <a:t>. 선급이 요구하는 기재 항목만 25개입니다[4]. 나중에 선주나 선급이 물으면 </a:t>
             </a:r>
             <a:r>
               <a:rPr sz="1280" b="1" i="0">
@@ -2633,7 +2644,18 @@
                 <a:ea typeface="Pretendard"/>
                 <a:cs typeface="Pretendard"/>
               </a:rPr>
-              <a:t>서류 더미를 뒤진다</a:t>
+              <a:t>서류 더미를 뒤집니다</a:t>
+            </a:r>
+            <a:r>
+              <a:rPr sz="1280" b="0" i="0">
+                <a:solidFill>
+                  <a:srgbClr val="1F2A44"/>
+                </a:solidFill>
+                <a:latin typeface="Pretendard"/>
+                <a:ea typeface="Pretendard"/>
+                <a:cs typeface="Pretendard"/>
+              </a:rPr>
+              <a:t>.</a:t>
             </a:r>
           </a:p>
           <a:p>
@@ -2659,7 +2681,7 @@
                 <a:ea typeface="Pretendard"/>
                 <a:cs typeface="Pretendard"/>
               </a:rPr>
-              <a:t>불합격이 나오면 같은 용접선의 다른 구간을 더 찍어 다시 판독해야 한다[4] — 불합격 1건이 촬영·판독·보고서로 다시 이어진다</a:t>
+              <a:t>불합격이 나오면 같은 용접선을 더 찍어 다시 판독해야 합니다[4]. 한 건이 촬영과 판독, 보고서로 계속 이어집니다.</a:t>
             </a:r>
           </a:p>
           <a:p>
@@ -2685,7 +2707,7 @@
                 <a:ea typeface="Pretendard"/>
                 <a:cs typeface="Pretendard"/>
               </a:rPr>
-              <a:t>조선 3사(HD현대중공업·삼성중공업·한화오션)의 2024~2026 AI 발표는 용접 ‘작업’과 카메라 검사에 몰려 있다[6][7]. </a:t>
+              <a:t>조선 3사가 2024~2026년에 내놓은 AI는 용접 ‘작업’과 카메라 검사에 몰려 있습니다[6][7]. </a:t>
             </a:r>
             <a:r>
               <a:rPr sz="1280" b="1" i="0">
@@ -2696,7 +2718,7 @@
                 <a:ea typeface="Pretendard"/>
                 <a:cs typeface="Pretendard"/>
               </a:rPr>
-              <a:t>판독 이후 단계(판정 근거·보고서·기록)에 대한 투자 사례는 찾지 못했다</a:t>
+              <a:t>판독 다음 단계인 판정 근거와 보고서, 기록에 투자한 사례는 찾지 못했습니다</a:t>
             </a:r>
             <a:r>
               <a:rPr sz="1280" b="0" i="0">
@@ -2707,7 +2729,7 @@
                 <a:ea typeface="Pretendard"/>
                 <a:cs typeface="Pretendard"/>
               </a:rPr>
-              <a:t>(2026.09 검색 기준)</a:t>
+              <a:t>(2026.09 검색 기준).</a:t>
             </a:r>
           </a:p>
           <a:p>
@@ -2733,7 +2755,7 @@
                 <a:ea typeface="Pretendard"/>
                 <a:cs typeface="Pretendard"/>
               </a:rPr>
-              <a:t>두산에너빌리티 D-Vision(RT 사진 AI 판독)은 2019년 사내 시범 → 2024.03 출시 → 2024.11 한국에너지공단 협약으로 이어졌다[8]. 아직 </a:t>
+              <a:t>두산에너빌리티의 RT 판독 AI는 2019년 사내 시범, 2024.03 출시, 2024.11 한국에너지공단 협약으로 이어졌습니다[8]. 아직 자사 적용과 외부 확산 단계라, </a:t>
             </a:r>
             <a:r>
               <a:rPr sz="1280" b="1" i="0">
@@ -2744,7 +2766,7 @@
                 <a:ea typeface="Pretendard"/>
                 <a:cs typeface="Pretendard"/>
               </a:rPr>
-              <a:t>자사 적용·외부 확산 시도 단계</a:t>
+              <a:t>문제는 진짜지만 돈 내고 쓸 고객이 있는지는 확인하지 못했습니다</a:t>
             </a:r>
             <a:r>
               <a:rPr sz="1280" b="0" i="0">
@@ -2755,18 +2777,7 @@
                 <a:ea typeface="Pretendard"/>
                 <a:cs typeface="Pretendard"/>
               </a:rPr>
-              <a:t>이고, 돈을 내고 쓰는 외부 고객은 공개 자료로 확인되지 않는다 → 문제는 실재하나 </a:t>
-            </a:r>
-            <a:r>
-              <a:rPr sz="1280" b="1" i="0">
-                <a:solidFill>
-                  <a:srgbClr val="1F2A44"/>
-                </a:solidFill>
-                <a:latin typeface="Pretendard"/>
-                <a:ea typeface="Pretendard"/>
-                <a:cs typeface="Pretendard"/>
-              </a:rPr>
-              <a:t>지불할 사람이 있는지는 미검증</a:t>
+              <a:t>.</a:t>
             </a:r>
           </a:p>
           <a:p>
@@ -2792,7 +2803,7 @@
                 <a:ea typeface="Pretendard"/>
                 <a:cs typeface="Pretendard"/>
               </a:rPr>
-              <a:t>판독 인력은 고령화로 줄고 있고[8], 최저가 입찰로 숙련자 확보가 어렵다[9]. 국내 비파괴검사(부수지 않고 속을 검사하는 방법의 총칭) 물량의 </a:t>
+              <a:t>판독 인력은 고령화로 줄고[8], 최저가 입찰 탓에 숙련자를 구하기도 어렵습니다[9]. 국내 비파괴검사는 물건을 부수지 않고 속을 보는 검사인데, 그 물량의 </a:t>
             </a:r>
             <a:r>
               <a:rPr sz="1280" b="1" i="0">
@@ -2803,7 +2814,7 @@
                 <a:ea typeface="Pretendard"/>
                 <a:cs typeface="Pretendard"/>
               </a:rPr>
-              <a:t>약 80%가 방사선 방식 용접부 검사</a:t>
+              <a:t>약 80%가 RT 용접부 검사</a:t>
             </a:r>
             <a:r>
               <a:rPr sz="1280" b="0" i="0">
@@ -2814,7 +2825,7 @@
                 <a:ea typeface="Pretendard"/>
                 <a:cs typeface="Pretendard"/>
               </a:rPr>
-              <a:t>[10] → 부담이 RT에 집중된다</a:t>
+              <a:t>입니다[10]. 부담이 한곳에 쏠립니다.</a:t>
             </a:r>
           </a:p>
         </p:txBody>
@@ -2964,7 +2975,7 @@
                 <a:ea typeface="Pretendard"/>
                 <a:cs typeface="Pretendard"/>
               </a:rPr>
-              <a:t>판독원의 하루에서 문서 작업과 서류 검색을 없앤다</a:t>
+              <a:t>판독원의 하루에서 서류 쓰기와 서류 찾기를 걷어내는 것</a:t>
             </a:r>
             <a:r>
               <a:rPr sz="1320" b="0" i="0">
@@ -2975,7 +2986,7 @@
                 <a:ea typeface="Pretendard"/>
                 <a:cs typeface="Pretendard"/>
               </a:rPr>
-              <a:t> — 합격·불합격은 자격자(국제 자격 ISO 9712의 Level 2 이상, 결과 해석·판정이 허용되는 등급[4])가 정하고, 서류는 AI가 만든다</a:t>
+              <a:t>이 목표입니다. 합격인지 아닌지는 자격을 가진 사람이 정하고, 서류는 AI가 씁니다. 국제 자격인 ISO 9712의 2급 이상이면 결과를 해석하고 판정할 수 있습니다[4].</a:t>
             </a:r>
           </a:p>
           <a:p>
@@ -3001,7 +3012,7 @@
                 <a:ea typeface="Pretendard"/>
                 <a:cs typeface="Pretendard"/>
               </a:rPr>
-              <a:t>목표 화면: 사진 열기 → 사람이 놓칠 만한 곳을 AI가 표시 → 클릭 두 번으로 크기 측정 → 규칙 엔진(기준표의 허용치와 대조해 합격·불합격을 내는 프로그램, AI 아님)이 판정 → 소견서(판독 결과 보고서) 초안 → 승인·PDF → 검색 가능한 기록까지 </a:t>
+              <a:t>화면 흐름은 이렇습니다. 사진 열기 → AI가 의심 자리 표시 → 클릭 두 번으로 크기 측정 → 규칙이 합격 여부 판정 → 보고서 초안 → 승인과 PDF → 검색되는 기록. </a:t>
             </a:r>
             <a:r>
               <a:rPr sz="1320" b="1" i="0">
@@ -3012,7 +3023,18 @@
                 <a:ea typeface="Pretendard"/>
                 <a:cs typeface="Pretendard"/>
               </a:rPr>
-              <a:t>한 화면에서 끝</a:t>
+              <a:t>한 화면에서 끝납니다</a:t>
+            </a:r>
+            <a:r>
+              <a:rPr sz="1320" b="0" i="0">
+                <a:solidFill>
+                  <a:srgbClr val="1F2A44"/>
+                </a:solidFill>
+                <a:latin typeface="Pretendard"/>
+                <a:ea typeface="Pretendard"/>
+                <a:cs typeface="Pretendard"/>
+              </a:rPr>
+              <a:t>.</a:t>
             </a:r>
           </a:p>
           <a:p>
@@ -3038,7 +3060,7 @@
                 <a:ea typeface="Pretendard"/>
                 <a:cs typeface="Pretendard"/>
               </a:rPr>
-              <a:t>입력은 </a:t>
+              <a:t>넣는 사진은 스캔한 필름이나 디지털 RT 사진입니다. 새 장비나 새 촬영 절차를 요구하지 않습니다. 다만 필름을 사진 파일로 바꾸는 </a:t>
             </a:r>
             <a:r>
               <a:rPr sz="1320" b="1" i="0">
@@ -3049,7 +3071,7 @@
                 <a:ea typeface="Pretendard"/>
                 <a:cs typeface="Pretendard"/>
               </a:rPr>
-              <a:t>스캔한 필름 사진 또는 디지털 RT 사진</a:t>
+              <a:t>스캐너는 미리 있어야 합니다</a:t>
             </a:r>
             <a:r>
               <a:rPr sz="1320" b="0" i="0">
@@ -3060,29 +3082,7 @@
                 <a:ea typeface="Pretendard"/>
                 <a:cs typeface="Pretendard"/>
               </a:rPr>
-              <a:t> — 판독원에게 새 장비나 새 촬영 절차를 요구하지 않는다. 단, 필름을 디지털 사진으로 바꾸는 </a:t>
-            </a:r>
-            <a:r>
-              <a:rPr sz="1320" b="1" i="0">
-                <a:solidFill>
-                  <a:srgbClr val="1F2A44"/>
-                </a:solidFill>
-                <a:latin typeface="Pretendard"/>
-                <a:ea typeface="Pretendard"/>
-                <a:cs typeface="Pretendard"/>
-              </a:rPr>
-              <a:t>필름 스캐너(디지타이저)</a:t>
-            </a:r>
-            <a:r>
-              <a:rPr sz="1320" b="0" i="0">
-                <a:solidFill>
-                  <a:srgbClr val="1F2A44"/>
-                </a:solidFill>
-                <a:latin typeface="Pretendard"/>
-                <a:ea typeface="Pretendard"/>
-                <a:cs typeface="Pretendard"/>
-              </a:rPr>
-              <a:t>는 조직이 갖춰야 할 전제조건이다(스캔 화질은 ISO 14096-2 등급 기준)</a:t>
+              <a:t>.</a:t>
             </a:r>
           </a:p>
         </p:txBody>
@@ -3206,7 +3206,7 @@
                 <a:ea typeface="Pretendard"/>
                 <a:cs typeface="Pretendard"/>
               </a:rPr>
-              <a:t>AI는 판정하지 않는다</a:t>
+              <a:t>AI는 판정하지 않습니다</a:t>
             </a:r>
           </a:p>
         </p:txBody>
@@ -3247,7 +3247,7 @@
                 <a:ea typeface="Pretendard"/>
                 <a:cs typeface="Pretendard"/>
               </a:rPr>
-              <a:t>합격·불합격 = 규칙 엔진 + 판독원, LLM = 글쓰기·검색 보조</a:t>
+              <a:t>합격 여부는 규칙과 판독원이 정하고, AI는 글쓰기와 검색만 돕습니다</a:t>
             </a:r>
           </a:p>
         </p:txBody>
@@ -3330,7 +3330,7 @@
                 <a:ea typeface="Pretendard"/>
                 <a:cs typeface="Pretendard"/>
               </a:rPr>
-              <a:t>기존 사진·기존 절차 위에</a:t>
+              <a:t>쓰던 사진, 쓰던 절차 그대로</a:t>
             </a:r>
           </a:p>
         </p:txBody>
@@ -3371,7 +3371,7 @@
                 <a:ea typeface="Pretendard"/>
                 <a:cs typeface="Pretendard"/>
               </a:rPr>
-              <a:t>스캔 필름이든 디지털 사진이든 같은 처리 흐름</a:t>
+              <a:t>스캔 필름이든 디지털 사진이든 처리 방법은 같습니다</a:t>
             </a:r>
           </a:p>
         </p:txBody>
@@ -3454,7 +3454,7 @@
                 <a:ea typeface="Pretendard"/>
                 <a:cs typeface="Pretendard"/>
               </a:rPr>
-              <a:t>탐지는 부품이다</a:t>
+              <a:t>탐지는 부품일 뿐입니다</a:t>
             </a:r>
           </a:p>
         </p:txBody>
@@ -3495,7 +3495,7 @@
                 <a:ea typeface="Pretendard"/>
                 <a:cs typeface="Pretendard"/>
               </a:rPr>
-              <a:t>새로움은 판독 업무 전체를 하나로 잇는 통합</a:t>
+              <a:t>새로운 점은 판독 업무 전체를 하나로 잇는 것입니다</a:t>
             </a:r>
           </a:p>
         </p:txBody>
@@ -3648,7 +3648,7 @@
                 <a:ea typeface="Pretendard"/>
                 <a:cs typeface="Pretendard"/>
               </a:rPr>
-              <a:t>선체 블록(배를 나눠 만든 뒤 붙이는 큰 구조물) 용접부 RT 사진의 판독·판정·보고서·기록 관리 — 생산 공정 뒤쪽의 용접 품질 확인 업무</a:t>
+              <a:t>배를 나눠 만든 큰 덩어리를 블록이라 부릅니다. 그 블록 용접부를 찍은 RT 사진을 판독하고 판정·보고서·기록까지 관리하는, 생산 공정 뒤쪽의 용접 품질 확인 업무입니다.</a:t>
             </a:r>
           </a:p>
         </p:txBody>
@@ -3689,7 +3689,7 @@
                 <a:ea typeface="Pretendard"/>
                 <a:cs typeface="Pretendard"/>
               </a:rPr>
-              <a:t>참고  [1] 황훈규 외, 한국정보통신학회논문지 25(2), 2021.02†  ·  [2] 데일리안·CCTV뉴스 2021.07.02†  ·  [3] IACS UR W34(2019.12; 2021.07.01 이후 건조계약분)  ·  [4] IACS UR W33 Rev.1/Corr.1(2021) §3.3·§8·§9.2  ·  [5] IACS UR W33 Rev.2·W34 Rev.1(2026.07.15 승인)  ·  [6] 뉴스핌 2026.06.04(한화오션×NC AI)†  ·  [7] 아시아투데이 2026.06(HD현대)†  ·  [8] 두산에너빌리티 통합보고서 2024·2026† · 팍스경제TV 2024† · 이투데이 2024.11.14† · 위키리크스한국 2026.03†  ·  [9] 가스신문 2025.09.18†  ·  [10] 가스신문 [전문가 기고] ‘글로벌 비파괴검사시장 현황과 국내 비파괴검사분야의 발전방안’(게재일 미확정, 기사 118513)†  ·  † 검색 요약 기준(제출 전 원문 확인)</a:t>
+              <a:t>참고  [1] 황훈규 외, 한국정보통신학회논문지 25(2), 2021.02†  ·  [2] 데일리안·CCTV뉴스 2021.07.02†  ·  [3] IACS UR W34(2019.12, 2021.07.01 이후 건조계약분)  ·  [4] IACS UR W33 Rev.1/Corr.1(2021) §3.3·§8·§9.2  ·  [5] IACS UR W33 Rev.2·W34 Rev.1(2026.07.15 승인)  ·  [6] 뉴스핌 2026.06.04 한화오션×NC AI†  ·  [7] 아시아투데이 2026.06 HD현대†  ·  [8] 두산에너빌리티 통합보고서 2024·2026† · 팍스경제TV 2024† · 이투데이 2024.11.14† · 위키리크스한국 2026.03†  ·  [9] 가스신문 2025.09.18†  ·  [10] 가스신문 전문가 기고(국내 비파괴검사 시장 현황, 기사 118513)†  ·  †는 검색 요약으로 확인한 자료입니다. 제출 전 원문을 확인합니다.</a:t>
             </a:r>
           </a:p>
         </p:txBody>
@@ -4470,7 +4470,7 @@
                 <a:ea typeface="Pretendard"/>
                 <a:cs typeface="Pretendard"/>
               </a:rPr>
-              <a:t> — 사진을 열면 사람이 놓칠 만한 곳을 AI가 표시한다. 판독원이 결함 종류를 확정하고 클릭 두 번으로 크기를 재면, 규칙 엔진이 결함 크기를 기준표와 대조해 합격·불합격을 낸다(누적 길이·기공 면적률은 100mm 구간을 옮겨가며 최악 구간으로 판정). 소견서·PDF·기록까지 한 화면에서 끝나는 </a:t>
+              <a:t>는 사진을 열면 AI가 의심 자리를 먼저 표시해 줍니다. 판독원이 결함 종류를 확정하고 클릭 두 번으로 크기를 재면, 규칙이 기준표와 대조해 합격 여부를 정합니다. 보고서와 PDF, 기록까지 한 화면에서 끝납니다. </a:t>
             </a:r>
             <a:r>
               <a:rPr sz="1300" b="1" i="0">
@@ -4481,7 +4481,7 @@
                 <a:ea typeface="Pretendard"/>
                 <a:cs typeface="Pretendard"/>
               </a:rPr>
-              <a:t>내 PC에서 도는 웹앱</a:t>
+              <a:t>사무실 PC에 설치해 브라우저로 쓰고</a:t>
             </a:r>
             <a:r>
               <a:rPr sz="1300" b="0" i="0">
@@ -4492,7 +4492,7 @@
                 <a:ea typeface="Pretendard"/>
                 <a:cs typeface="Pretendard"/>
               </a:rPr>
-              <a:t>(Streamlit: 브라우저로 표시, 같은 와이파이의 태블릿에서도 접속)</a:t>
+              <a:t>, 같은 와이파이에 있는 태블릿에서도 열립니다.</a:t>
             </a:r>
           </a:p>
         </p:txBody>
@@ -4533,7 +4533,7 @@
                 <a:ea typeface="Pretendard"/>
                 <a:cs typeface="Pretendard"/>
               </a:rPr>
-              <a:t>사용자: RT 판독원(비파괴검사 자격자) 1인 — 검사업체 판독원 또는 조선소 품질 담당 · 판정·승인은 언제나 사람이 한다</a:t>
+              <a:t>쓰는 사람은 RT 판독원 한 명입니다. 검사업체 판독원이나 조선소 품질 담당자가 쓰고, 판정과 승인은 언제나 사람이 합니다.</a:t>
             </a:r>
           </a:p>
         </p:txBody>
@@ -4603,7 +4603,7 @@
                 <a:ea typeface="Pretendard"/>
                 <a:cs typeface="Pretendard"/>
               </a:rPr>
-              <a:t>① 2차 눈(Second Reader)</a:t>
+              <a:t>① 두 번째 눈</a:t>
             </a:r>
           </a:p>
         </p:txBody>
@@ -4644,7 +4644,7 @@
                 <a:ea typeface="Pretendard"/>
                 <a:cs typeface="Pretendard"/>
               </a:rPr>
-              <a:t>판독원이 먼저 보고, 사람이 놓칠 만한 후보를 AI가 표시한다. 미탐(놓침)을 줄이는 쪽으로 조정 — 오탐은 클릭 한 번으로 지우지만 놓친 결함은 배에 남는다. 결함 종류는 </a:t>
+              <a:t>판독원이 먼저 보고, 놓치기 쉬운 자리를 AI가 표시합니다. 놓침을 줄이는 쪽으로 맞췄습니다. 헛짚은 표시는 클릭 한 번으로 지우면 되지만, 놓친 결함은 배에 그대로 남기 때문입니다. 결함 종류는 </a:t>
             </a:r>
             <a:r>
               <a:rPr sz="1100" b="1" i="0">
@@ -4655,7 +4655,18 @@
                 <a:ea typeface="Pretendard"/>
                 <a:cs typeface="Pretendard"/>
               </a:rPr>
-              <a:t>판독원이 확정한 뒤 채택</a:t>
+              <a:t>판독원이 정한 뒤에</a:t>
+            </a:r>
+            <a:r>
+              <a:rPr sz="1100" b="0" i="0">
+                <a:solidFill>
+                  <a:srgbClr val="1F2A44"/>
+                </a:solidFill>
+                <a:latin typeface="Pretendard"/>
+                <a:ea typeface="Pretendard"/>
+                <a:cs typeface="Pretendard"/>
+              </a:rPr>
+              <a:t> 반영합니다.</a:t>
             </a:r>
           </a:p>
         </p:txBody>
@@ -4725,7 +4736,7 @@
                 <a:ea typeface="Pretendard"/>
                 <a:cs typeface="Pretendard"/>
               </a:rPr>
-              <a:t>② 2클릭 자 + 규칙 판정</a:t>
+              <a:t>② 클릭 두 번 자와 규칙 판정</a:t>
             </a:r>
           </a:p>
         </p:txBody>
@@ -4766,7 +4777,7 @@
                 <a:ea typeface="Pretendard"/>
                 <a:cs typeface="Pretendard"/>
               </a:rPr>
-              <a:t>사진 속 자 역할의 </a:t>
+              <a:t>사진 속에서 자 역할을 하는 </a:t>
             </a:r>
             <a:r>
               <a:rPr sz="1100" b="1" i="0">
@@ -4788,7 +4799,7 @@
                 <a:ea typeface="Pretendard"/>
                 <a:cs typeface="Pretendard"/>
               </a:rPr>
-              <a:t>와 결함의 양 끝을 각각 클릭 두 번 해 mm/픽셀·크기 확정(IQI는 화질 확인용) → 규칙 엔진(앱 표기: 룰 엔진)이 </a:t>
+              <a:t> 양 끝을 클릭해 1픽셀이 몇 mm인지 정하고, 결함 양 끝을 클릭해 크기를 확정합니다. 그러면 규칙이 </a:t>
             </a:r>
             <a:r>
               <a:rPr sz="1100" b="1" i="0">
@@ -4799,7 +4810,7 @@
                 <a:ea typeface="Pretendard"/>
                 <a:cs typeface="Pretendard"/>
               </a:rPr>
-              <a:t>단일 크기·누적 길이·기공 면적률(%)</a:t>
+              <a:t>길이·누적 길이·기공 면적률</a:t>
             </a:r>
             <a:r>
               <a:rPr sz="1100" b="0" i="0">
@@ -4810,7 +4821,7 @@
                 <a:ea typeface="Pretendard"/>
                 <a:cs typeface="Pretendard"/>
               </a:rPr>
-              <a:t> 3종 판정 + 근거 조항 제시</a:t>
+              <a:t> 세 가지로 판정하고 근거 조항을 함께 적습니다.</a:t>
             </a:r>
           </a:p>
         </p:txBody>
@@ -4880,7 +4891,7 @@
                 <a:ea typeface="Pretendard"/>
                 <a:cs typeface="Pretendard"/>
               </a:rPr>
-              <a:t>③ 소견서 초안 + 자연어 검색</a:t>
+              <a:t>③ 보고서 초안과 말로 검색</a:t>
             </a:r>
           </a:p>
         </p:txBody>
@@ -4921,7 +4932,7 @@
                 <a:ea typeface="Pretendard"/>
                 <a:cs typeface="Pretendard"/>
               </a:rPr>
-              <a:t>확정된 판정 결과(사진·개인정보 제외)를 LLM이 보고서 문체로 작성 → 판독원 수정·승인 → PDF. 기록에서는 ‘3번 블록 지난달 기공 불합격’처럼 말로 검색·요약 — LLM이 없어도 규칙 파서·템플릿으로 동작</a:t>
+              <a:t>확정된 판정 결과만 LLM에 보내 보고서 문체로 씁니다. 사진과 개인정보는 보내지 않습니다. 판독원이 고쳐서 승인하면 PDF가 됩니다. 기록은 ‘3번 블록 지난달 기공 불합격’처럼 말로 찾습니다. LLM이 없어도 규칙 검색과 템플릿으로 돌아갑니다.</a:t>
             </a:r>
           </a:p>
         </p:txBody>
@@ -4991,7 +5002,7 @@
                 <a:ea typeface="Pretendard"/>
                 <a:cs typeface="Pretendard"/>
               </a:rPr>
-              <a:t>④ 검색 기록 + 데이터 축적</a:t>
+              <a:t>④ 검색되는 기록과 데이터 쌓기</a:t>
             </a:r>
           </a:p>
         </p:txBody>
@@ -5032,7 +5043,7 @@
                 <a:ea typeface="Pretendard"/>
                 <a:cs typeface="Pretendard"/>
               </a:rPr>
-              <a:t>승인 기록 DB·조건 검색·CSV(앱 탭: 아카이브 검색·자기개선 루프). 채택·직접 추가한 결함 박스는 학습 라벨로 내보내고, 기각은 오탐 신호로 집계만 — 재학습은 별도 프로젝트, 데이터는 반출 없이 조직 소유</a:t>
+              <a:t>승인한 기록을 데이터베이스에 쌓고, 조건 검색과 CSV 내보내기를 지원합니다. 채택했거나 직접 그린 결함 상자는 학습용 라벨로 내보내고, 기각한 것은 헛짚음 신호로 셉니다. 재학습은 따로 할 일이고, 데이터는 밖으로 나가지 않습니다.</a:t>
             </a:r>
           </a:p>
         </p:txBody>
@@ -5244,7 +5255,7 @@
                 <a:ea typeface="Pretendard"/>
                 <a:cs typeface="Pretendard"/>
               </a:rPr>
-              <a:t>Ultralytics YOLO(</a:t>
+              <a:t>Ultralytics YOLO를 씁니다(</a:t>
             </a:r>
             <a:r>
               <a:rPr sz="1050" b="1" i="0">
@@ -5266,7 +5277,7 @@
                 <a:ea typeface="Pretendard"/>
                 <a:cs typeface="Pretendard"/>
               </a:rPr>
-              <a:t> 권장, 2026.01 공개[1]; v8·11 호환) — AGPL-3.0이라 사내 배포 시 Enterprise 라이선스 또는 대체 모델 필요. CLAHE(대비 향상)와 함께 공개 데이터 학습 예정. </a:t>
+              <a:t> 권장, 2026.01 공개[1], v8·v11 호환). AGPL-3.0 라이선스라 사내 배포 때는 유료 라이선스나 다른 모델이 필요합니다. </a:t>
             </a:r>
             <a:r>
               <a:rPr sz="1050" b="1" i="0">
@@ -5277,7 +5288,7 @@
                 <a:ea typeface="Pretendard"/>
                 <a:cs typeface="Pretendard"/>
               </a:rPr>
-              <a:t>지금은 대체용(폴백) OpenCV 규칙 탐지기</a:t>
+              <a:t>지금은 대체용 OpenCV 탐지기</a:t>
             </a:r>
             <a:r>
               <a:rPr sz="1050" b="0" i="0">
@@ -5288,7 +5299,7 @@
                 <a:ea typeface="Pretendard"/>
                 <a:cs typeface="Pretendard"/>
               </a:rPr>
-              <a:t>: 합성 필름 6장의 결함 14개 중 14개 탐지, 장당 오탐 3.8건(신뢰도 기준 0.5). 가중치+ultralytics≥8.4 설치 시 자동 전환</a:t>
+              <a:t>가 돌아갑니다. 합성 필름 6장의 결함 14개를 모두 찾았고, 장당 헛짚음은 3.8건이었습니다(신뢰도 기준 0.5). 가중치와 ultralytics 8.4 이상을 넣으면 자동으로 바뀝니다.</a:t>
             </a:r>
           </a:p>
         </p:txBody>
@@ -5358,7 +5369,7 @@
                 <a:ea typeface="Pretendard"/>
                 <a:cs typeface="Pretendard"/>
               </a:rPr>
-              <a:t>소견서·검색 LLM(로컬 우선)</a:t>
+              <a:t>보고서·검색 LLM(로컬 우선)</a:t>
             </a:r>
           </a:p>
         </p:txBody>
@@ -5410,7 +5421,7 @@
                 <a:ea typeface="Pretendard"/>
                 <a:cs typeface="Pretendard"/>
               </a:rPr>
-              <a:t>사내 PC의 로컬 LLM</a:t>
+              <a:t>사무실 PC 안에서 도는 LLM</a:t>
             </a:r>
             <a:r>
               <a:rPr sz="1050" b="0" i="0">
@@ -5421,7 +5432,7 @@
                 <a:ea typeface="Pretendard"/>
                 <a:cs typeface="Pretendard"/>
               </a:rPr>
-              <a:t>(Ollama·vLLM[3]) 또는 오프라인 템플릿. 한국어 모델: EXAONE(코드 기본값 3.5)[4](연구·비상업 라이선스 — 상용 배포 시 교체)·HyperCLOVA X SEED[5]. 클라우드는 사용자가 </a:t>
+              <a:t>이거나 오프라인 템플릿입니다(Ollama·vLLM[3]). 한국어 모델은 EXAONE(코드 기본값 3.5)[4]과 HyperCLOVA X SEED[5]를 봅니다. EXAONE은 연구·비상업 라이선스라 상용 배포 때는 바꿉니다. 클라우드는 </a:t>
             </a:r>
             <a:r>
               <a:rPr sz="1050" b="1" i="0">
@@ -5432,7 +5443,7 @@
                 <a:ea typeface="Pretendard"/>
                 <a:cs typeface="Pretendard"/>
               </a:rPr>
-              <a:t>직접 허용할 때만</a:t>
+              <a:t>사용자가 직접 켤 때만</a:t>
             </a:r>
             <a:r>
               <a:rPr sz="1050" b="0" i="0">
@@ -5443,7 +5454,7 @@
                 <a:ea typeface="Pretendard"/>
                 <a:cs typeface="Pretendard"/>
               </a:rPr>
-              <a:t> 쓴다(기본 Claude Sonnet 5[3]). 사진·실명·파일 경로는 보내지 않는다(전송 내용 미리보기 제공)</a:t>
+              <a:t> 씁니다(기본 Claude Sonnet 5[3]). 사진과 실명, 파일 경로는 보내지 않고 보낼 내용을 미리 보여 줍니다.</a:t>
             </a:r>
           </a:p>
         </p:txBody>
@@ -5513,7 +5524,7 @@
                 <a:ea typeface="Pretendard"/>
                 <a:cs typeface="Pretendard"/>
               </a:rPr>
-              <a:t>합격·불합격 판정(일부러 AI 미사용)</a:t>
+              <a:t>합격 여부 판정(일부러 AI를 안 씁니다)</a:t>
             </a:r>
           </a:p>
         </p:txBody>
@@ -5554,7 +5565,7 @@
                 <a:ea typeface="Pretendard"/>
                 <a:cs typeface="Pretendard"/>
               </a:rPr>
-              <a:t>규칙 엔진 — ISO 10675-1(RT 합격 기준)·ISO 5817(용접 품질 등급)의 틀(등급 B·C·D ↔ 허용 레벨 1·2·3, 100mm 구간, 기공 면적률)을 본뜬 기준표 JSON 2종(신판·구판 구조, 데모 수치)을 화면에서 선택. 실제 수치는 선급 지침 확정 후 교체</a:t>
+              <a:t>규칙이 판정합니다. ISO 10675-1의 RT 합격 기준과 ISO 5817의 용접 품질 등급 틀을 본뜬 기준표 두 벌을 화면에서 고릅니다. 등급 B·C·D가 허용 레벨 1·2·3과 짝을 이루고, 100mm 구간과 기공 면적률을 함께 봅니다. 실제 수치는 선급 지침을 확인한 뒤 바꿔 끼웁니다.</a:t>
             </a:r>
           </a:p>
         </p:txBody>
@@ -5676,7 +5687,7 @@
                 <a:ea typeface="Pretendard"/>
                 <a:cs typeface="Pretendard"/>
               </a:rPr>
-              <a:t>로 설계·구현·적대적 코드 리뷰(자동 테스트 281건). 본선에서는 해커톤 지원 항목인 Claude Max 플랜(공고 기준)으로 고도화</a:t>
+              <a:t>로 설계와 구현, 코드 점검을 했습니다(자동 테스트 281건). 본선에서는 해커톤이 지원하는 Claude Max 플랜으로 더 다듬겠습니다.</a:t>
             </a:r>
           </a:p>
         </p:txBody>
@@ -5757,7 +5768,7 @@
                 <a:ea typeface="Pretendard"/>
                 <a:cs typeface="Pretendard"/>
               </a:rPr>
-              <a:t>  Python 3.11 · Streamlit 1.63[10] · OpenCV · SQLite · reportlab(PDF) · 합성 필름 생성기 · Docker · 더블클릭 실행</a:t>
+              <a:t>  Python 3.11 · Streamlit 1.63[10] · OpenCV · SQLite · reportlab · 합성 필름 생성기 · Docker · 더블클릭 실행</a:t>
             </a:r>
           </a:p>
         </p:txBody>
@@ -5885,7 +5896,7 @@
           </a:bodyPr>
           <a:lstStyle/>
           <a:p>
-            <a:pPr marL="148970" indent="-148970">
+            <a:pPr marL="160654" indent="-160654">
               <a:lnSpc>
                 <a:spcPct val="114000"/>
               </a:lnSpc>
@@ -5899,41 +5910,52 @@
               <a:buChar char="•"/>
             </a:pPr>
             <a:r>
-              <a:rPr sz="1019" b="1" i="0">
-                <a:solidFill>
-                  <a:srgbClr val="1F2A44"/>
-                </a:solidFill>
-                <a:latin typeface="Pretendard"/>
-                <a:ea typeface="Pretendard"/>
-                <a:cs typeface="Pretendard"/>
-              </a:rPr>
-              <a:t>결함 찾기(탐지) 하나만으로는 새롭지 않다</a:t>
-            </a:r>
-            <a:r>
-              <a:rPr sz="1019" b="0" i="0">
-                <a:solidFill>
-                  <a:srgbClr val="1F2A44"/>
-                </a:solidFill>
-                <a:latin typeface="Pretendard"/>
-                <a:ea typeface="Pretendard"/>
-                <a:cs typeface="Pretendard"/>
-              </a:rPr>
-              <a:t> — D-Vision(자사 적용), 코드비전 RT AI 판독 플랫폼(2024.10 전시)[6], Trueflaw(핀란드; Meyer Turku 조선소·DEKRA와 협업 2022.02)[7], DNV×GSI(광저우조선) 공동개발(2019.12)[8] → 새로움은 판독원의 하루 전체를 </a:t>
-            </a:r>
-            <a:r>
-              <a:rPr sz="1019" b="1" i="0">
-                <a:solidFill>
-                  <a:srgbClr val="1F2A44"/>
-                </a:solidFill>
-                <a:latin typeface="Pretendard"/>
-                <a:ea typeface="Pretendard"/>
-                <a:cs typeface="Pretendard"/>
-              </a:rPr>
-              <a:t>하나로 잇는 통합</a:t>
-            </a:r>
-          </a:p>
-          <a:p>
-            <a:pPr marL="148970" indent="-148970">
+              <a:rPr sz="1100" b="1" i="0">
+                <a:solidFill>
+                  <a:srgbClr val="1F2A44"/>
+                </a:solidFill>
+                <a:latin typeface="Pretendard"/>
+                <a:ea typeface="Pretendard"/>
+                <a:cs typeface="Pretendard"/>
+              </a:rPr>
+              <a:t>결함을 찾는 것만으로는 새롭지 않습니다.</a:t>
+            </a:r>
+            <a:r>
+              <a:rPr sz="1100" b="0" i="0">
+                <a:solidFill>
+                  <a:srgbClr val="1F2A44"/>
+                </a:solidFill>
+                <a:latin typeface="Pretendard"/>
+                <a:ea typeface="Pretendard"/>
+                <a:cs typeface="Pretendard"/>
+              </a:rPr>
+              <a:t> 두산에너빌리티의 자사 적용, 코드비전의 RT AI 판독 플랫폼(2024.10 전시)[6], 핀란드 Trueflaw의 조선소 협업(2022.02)[7], DNV와 광저우조선의 공동개발(2019.12)[8]이 이미 있습니다. 새로운 점은 판독원의 하루 전체를 </a:t>
+            </a:r>
+            <a:r>
+              <a:rPr sz="1100" b="1" i="0">
+                <a:solidFill>
+                  <a:srgbClr val="1F2A44"/>
+                </a:solidFill>
+                <a:latin typeface="Pretendard"/>
+                <a:ea typeface="Pretendard"/>
+                <a:cs typeface="Pretendard"/>
+              </a:rPr>
+              <a:t>하나로 잇는 것</a:t>
+            </a:r>
+            <a:r>
+              <a:rPr sz="1100" b="0" i="0">
+                <a:solidFill>
+                  <a:srgbClr val="1F2A44"/>
+                </a:solidFill>
+                <a:latin typeface="Pretendard"/>
+                <a:ea typeface="Pretendard"/>
+                <a:cs typeface="Pretendard"/>
+              </a:rPr>
+              <a:t>입니다.</a:t>
+            </a:r>
+          </a:p>
+          <a:p>
+            <a:pPr marL="160654" indent="-160654">
               <a:lnSpc>
                 <a:spcPct val="114000"/>
               </a:lnSpc>
@@ -5947,30 +5969,30 @@
               <a:buChar char="•"/>
             </a:pPr>
             <a:r>
-              <a:rPr sz="1019" b="1" i="0">
-                <a:solidFill>
-                  <a:srgbClr val="1F2A44"/>
-                </a:solidFill>
-                <a:latin typeface="Pretendard"/>
-                <a:ea typeface="Pretendard"/>
-                <a:cs typeface="Pretendard"/>
-              </a:rPr>
-              <a:t>한화오션(당시 대우조선해양) 디지털 RT(2020.11~2021.07)와의 관계</a:t>
-            </a:r>
-            <a:r>
-              <a:rPr sz="1019" b="0" i="0">
-                <a:solidFill>
-                  <a:srgbClr val="1F2A44"/>
-                </a:solidFill>
-                <a:latin typeface="Pretendard"/>
-                <a:ea typeface="Pretendard"/>
-                <a:cs typeface="Pretendard"/>
-              </a:rPr>
-              <a:t>: 2020.11 검사 로봇·2021.07 필름리스 RT 발표와 같은 시기의 국책과제(필름 스캐너·AI 자동 판독 플랫폼)를 아우른 특정 조선소 중심의 사내 체계였고, 선급 비대면 승인은 5대 선급과 ‘개발하기로 한’ 협약 단계였다[2]. 본 안의 차이는 ① 검사업체·조선소가 공용으로 쓰는 설치형 ② 판정을 규칙 엔진+자격자에 두고 조항 번호·100mm 구간을 기록 ③ 소견서 LLM·자연어 검색</a:t>
-            </a:r>
-          </a:p>
-          <a:p>
-            <a:pPr marL="148970" indent="-148970">
+              <a:rPr sz="1100" b="1" i="0">
+                <a:solidFill>
+                  <a:srgbClr val="1F2A44"/>
+                </a:solidFill>
+                <a:latin typeface="Pretendard"/>
+                <a:ea typeface="Pretendard"/>
+                <a:cs typeface="Pretendard"/>
+              </a:rPr>
+              <a:t>한화오션(당시 대우조선해양) 디지털 RT와의 차이</a:t>
+            </a:r>
+            <a:r>
+              <a:rPr sz="1100" b="0" i="0">
+                <a:solidFill>
+                  <a:srgbClr val="1F2A44"/>
+                </a:solidFill>
+                <a:latin typeface="Pretendard"/>
+                <a:ea typeface="Pretendard"/>
+                <a:cs typeface="Pretendard"/>
+              </a:rPr>
+              <a:t>도 분명합니다. 그때 것은 검사 로봇(2020.11)과 필름리스 RT(2021.07), 같은 시기 국책과제를 묶은 특정 조선소 안의 체계였고, 선급 비대면 승인은 다섯 곳과 ‘함께 만들기로 한’ 협약 단계였습니다[2]. 이 제안은 검사업체와 조선소가 같이 쓰는 설치형이고, 판정을 규칙과 자격자에게 맡기면서 조항 번호와 100mm 구간을 기록에 남깁니다.</a:t>
+            </a:r>
+          </a:p>
+          <a:p>
+            <a:pPr marL="160654" indent="-160654">
               <a:lnSpc>
                 <a:spcPct val="114000"/>
               </a:lnSpc>
@@ -5984,30 +6006,52 @@
               <a:buChar char="•"/>
             </a:pPr>
             <a:r>
-              <a:rPr sz="1019" b="1" i="0">
-                <a:solidFill>
-                  <a:srgbClr val="1F2A44"/>
-                </a:solidFill>
-                <a:latin typeface="Pretendard"/>
-                <a:ea typeface="Pretendard"/>
-                <a:cs typeface="Pretendard"/>
-              </a:rPr>
-              <a:t>AI는 판정하지 않는다</a:t>
-            </a:r>
-            <a:r>
-              <a:rPr sz="1019" b="0" i="0">
-                <a:solidFill>
-                  <a:srgbClr val="1F2A44"/>
-                </a:solidFill>
-                <a:latin typeface="Pretendard"/>
-                <a:ea typeface="Pretendard"/>
-                <a:cs typeface="Pretendard"/>
-              </a:rPr>
-              <a:t> — DNV도 2019.12 ‘AI는 탐지, 사람은 최종 승인’으로 역할을 나눴고[8], AI 판독을 선급이 규칙으로 승인한 공개 사례는 2026.09 기준 확인되지 않는다</a:t>
-            </a:r>
-          </a:p>
-          <a:p>
-            <a:pPr marL="148970" indent="-148970">
+              <a:rPr sz="1100" b="1" i="0">
+                <a:solidFill>
+                  <a:srgbClr val="1F2A44"/>
+                </a:solidFill>
+                <a:latin typeface="Pretendard"/>
+                <a:ea typeface="Pretendard"/>
+                <a:cs typeface="Pretendard"/>
+              </a:rPr>
+              <a:t>AI는 판정하지 않습니다.</a:t>
+            </a:r>
+            <a:r>
+              <a:rPr sz="1100" b="0" i="0">
+                <a:solidFill>
+                  <a:srgbClr val="1F2A44"/>
+                </a:solidFill>
+                <a:latin typeface="Pretendard"/>
+                <a:ea typeface="Pretendard"/>
+                <a:cs typeface="Pretendard"/>
+              </a:rPr>
+              <a:t> DNV도 2019.12에 탐지는 AI, 최종 승인은 사람으로 역할을 나눴고[8], AI 판독을 선급이 규칙으로 승인한 공개 사례는 2026.09 기준 확인되지 않습니다. 그래서 규칙이 바뀌길 기다리지 않고 </a:t>
+            </a:r>
+            <a:r>
+              <a:rPr sz="1100" b="1" i="0">
+                <a:solidFill>
+                  <a:srgbClr val="1F2A44"/>
+                </a:solidFill>
+                <a:latin typeface="Pretendard"/>
+                <a:ea typeface="Pretendard"/>
+                <a:cs typeface="Pretendard"/>
+              </a:rPr>
+              <a:t>지금 규칙 안에서 보조 도구로 바로 쓸 수 있습니다</a:t>
+            </a:r>
+            <a:r>
+              <a:rPr sz="1100" b="0" i="0">
+                <a:solidFill>
+                  <a:srgbClr val="1F2A44"/>
+                </a:solidFill>
+                <a:latin typeface="Pretendard"/>
+                <a:ea typeface="Pretendard"/>
+                <a:cs typeface="Pretendard"/>
+              </a:rPr>
+              <a:t>(UR W33 §3.3·§6.1.2·§8.5)[9].</a:t>
+            </a:r>
+          </a:p>
+          <a:p>
+            <a:pPr marL="160654" indent="-160654">
               <a:lnSpc>
                 <a:spcPct val="114000"/>
               </a:lnSpc>
@@ -6021,66 +6065,18 @@
               <a:buChar char="•"/>
             </a:pPr>
             <a:r>
-              <a:rPr sz="1019" b="0" i="0">
-                <a:solidFill>
-                  <a:srgbClr val="1F2A44"/>
-                </a:solidFill>
-                <a:latin typeface="Pretendard"/>
-                <a:ea typeface="Pretendard"/>
-                <a:cs typeface="Pretendard"/>
-              </a:rPr>
-              <a:t>본 안은 판정을 규칙 엔진(조항 번호 자동 기재)에, 글쓰기·검색을 LLM에 맡긴다 → AI 판독에 대한 규칙 개정을 기다리지 않고, </a:t>
-            </a:r>
-            <a:r>
-              <a:rPr sz="1019" b="1" i="0">
-                <a:solidFill>
-                  <a:srgbClr val="1F2A44"/>
-                </a:solidFill>
-                <a:latin typeface="Pretendard"/>
-                <a:ea typeface="Pretendard"/>
-                <a:cs typeface="Pretendard"/>
-              </a:rPr>
-              <a:t>자격자 판정·서면 절차·기록 관리 요건(UR W33 §3.3·§6.1.2·§8.5) 안에서 보조 도구로 도입 가능</a:t>
-            </a:r>
-            <a:r>
-              <a:rPr sz="1019" b="0" i="0">
-                <a:solidFill>
-                  <a:srgbClr val="1F2A44"/>
-                </a:solidFill>
-                <a:latin typeface="Pretendard"/>
-                <a:ea typeface="Pretendard"/>
-                <a:cs typeface="Pretendard"/>
-              </a:rPr>
-              <a:t>[9]</a:t>
-            </a:r>
-          </a:p>
-          <a:p>
-            <a:pPr marL="148970" indent="-148970">
-              <a:lnSpc>
-                <a:spcPct val="114000"/>
-              </a:lnSpc>
-              <a:spcAft>
-                <a:spcPts val="300"/>
-              </a:spcAft>
-              <a:buClr>
-                <a:srgbClr val="4FD0F5"/>
-              </a:buClr>
-              <a:buFont typeface="Arial"/>
-              <a:buChar char="•"/>
-            </a:pPr>
-            <a:r>
-              <a:rPr sz="1019" b="0" i="0">
-                <a:solidFill>
-                  <a:srgbClr val="1F2A44"/>
-                </a:solidFill>
-                <a:latin typeface="Pretendard"/>
-                <a:ea typeface="Pretendard"/>
-                <a:cs typeface="Pretendard"/>
-              </a:rPr>
-              <a:t>픽셀→mm 환산은 </a:t>
-            </a:r>
-            <a:r>
-              <a:rPr sz="1019" b="1" i="0">
+              <a:rPr sz="1100" b="0" i="0">
+                <a:solidFill>
+                  <a:srgbClr val="1F2A44"/>
+                </a:solidFill>
+                <a:latin typeface="Pretendard"/>
+                <a:ea typeface="Pretendard"/>
+                <a:cs typeface="Pretendard"/>
+              </a:rPr>
+              <a:t>픽셀을 mm로 바꾸는 일은 </a:t>
+            </a:r>
+            <a:r>
+              <a:rPr sz="1100" b="1" i="0">
                 <a:solidFill>
                   <a:srgbClr val="1F2A44"/>
                 </a:solidFill>
@@ -6091,15 +6087,15 @@
               <a:t>판독원의 클릭 두 번</a:t>
             </a:r>
             <a:r>
-              <a:rPr sz="1019" b="0" i="0">
-                <a:solidFill>
-                  <a:srgbClr val="1F2A44"/>
-                </a:solidFill>
-                <a:latin typeface="Pretendard"/>
-                <a:ea typeface="Pretendard"/>
-                <a:cs typeface="Pretendard"/>
-              </a:rPr>
-              <a:t>으로 확정 — AI가 추정하지 않는다. 보안 기본값도 로컬(클라우드는 사용자가 켜야만 쓰는 선택 사항)</a:t>
+              <a:rPr sz="1100" b="0" i="0">
+                <a:solidFill>
+                  <a:srgbClr val="1F2A44"/>
+                </a:solidFill>
+                <a:latin typeface="Pretendard"/>
+                <a:ea typeface="Pretendard"/>
+                <a:cs typeface="Pretendard"/>
+              </a:rPr>
+              <a:t>으로 정합니다. AI가 어림잡지 않습니다. 보안 기본값도 로컬이고, 클라우드는 사용자가 켜야만 켜집니다.</a:t>
             </a:r>
           </a:p>
         </p:txBody>
@@ -6140,7 +6136,7 @@
                 <a:ea typeface="Pretendard"/>
                 <a:cs typeface="Pretendard"/>
               </a:rPr>
-              <a:t>참고  [1] Ultralytics 8.4.0 릴리스·PyPI(2026.01.14, AGPL-3.0)  ·  [2] 데일리안·CCTV뉴스 2021.07.02† · 황훈규 외 2021.02† · KISTI TRKO202200005836†  ·  [3] Anthropic 모델 문서 · Ollama/vLLM API 문서  ·  [4] LG AI연구원 EXAONE README·LICENSE(2026.04.09)  ·  [5] NAVER HyperCLOVA X SEED Think 보도자료(2025.12.26)†  ·  [6] 헬로티 2024.10(코드비전)†  ·  [7] Trueflaw LinkedIn 2022.02†  ·  [8] DNV GL×GSI 보도자료(2019.12)†  ·  [9] IACS UR W33 Rev.1/Corr.1(2021) §3.3·§6.1.2·§8.5  ·  [10] Streamlit PyPI 1.63.0(2026.09.01)  ·  탐지 수치는 합성 필름 6장 자체 측정(느슨한 매칭 기준)  ·  † 검색 요약 기준</a:t>
+              <a:t>참고  [1] Ultralytics 8.4.0 릴리스·PyPI(2026.01.14, AGPL-3.0)  ·  [2] 데일리안·CCTV뉴스 2021.07.02† · 황훈규 외 2021.02† · KISTI TRKO202200005836†  ·  [3] Anthropic 모델 문서 · Ollama/vLLM API 문서  ·  [4] LG AI연구원 EXAONE README·LICENSE(2026.04.09)  ·  [5] NAVER HyperCLOVA X SEED Think 보도자료(2025.12.26)†  ·  [6] 헬로티 2024.10 코드비전†  ·  [7] Trueflaw LinkedIn 2022.02(Meyer Turku 조선소·DEKRA 협업)†  ·  [8] DNV GL×GSI 보도자료(2019.12)†  ·  [9] IACS UR W33 Rev.1/Corr.1(2021) §3.3·§6.1.2·§8.5  ·  [10] Streamlit PyPI 1.63.0(2026.09.01)  ·  탐지 수치는 합성 필름 6장을 직접 측정한 값입니다  ·  †는 검색 요약으로 확인한 자료입니다.</a:t>
             </a:r>
           </a:p>
         </p:txBody>
@@ -6817,7 +6813,7 @@
         <p:spPr>
           <a:xfrm>
             <a:off x="4800600" y="1371600"/>
-            <a:ext cx="7818120" cy="2971800"/>
+            <a:ext cx="7818120" cy="3154680"/>
           </a:xfrm>
           <a:prstGeom prst="roundRect">
             <a:avLst>
@@ -6946,7 +6942,7 @@
                 <a:ea typeface="Pretendard"/>
                 <a:cs typeface="Pretendard"/>
               </a:rPr>
-              <a:t>현재 동작 프로토타입(2026.09 기준)</a:t>
+              <a:t>지금 돌아가는 프로토타입(2026.09 기준)</a:t>
             </a:r>
           </a:p>
         </p:txBody>
@@ -6960,7 +6956,7 @@
         <p:spPr>
           <a:xfrm>
             <a:off x="5120640" y="2606040"/>
-            <a:ext cx="3451860" cy="1600200"/>
+            <a:ext cx="3451860" cy="1783080"/>
           </a:xfrm>
           <a:prstGeom prst="rect">
             <a:avLst/>
@@ -6995,7 +6991,7 @@
                 <a:ea typeface="Pretendard"/>
                 <a:cs typeface="Pretendard"/>
               </a:rPr>
-              <a:t>내 PC에서 도는 웹앱 — 4대 기능 전 구간 동작(탐지→측정→판정→소견서→PDF→기록) · 로컬 LLM 우선 · 자연어 검색</a:t>
+              <a:t>사무실 PC에서 도는 웹앱입니다. 탐지부터 측정, 판정, 보고서, PDF, 기록까지 끊기지 않고 돌아갑니다. 로컬 LLM을 먼저 쓰고 말로도 검색됩니다.</a:t>
             </a:r>
           </a:p>
           <a:p>
@@ -7021,7 +7017,7 @@
                 <a:ea typeface="Pretendard"/>
                 <a:cs typeface="Pretendard"/>
               </a:rPr>
-              <a:t>자동 테스트 281건 통과 · 합성 필름으로 전 과정 자동 검증[1]</a:t>
+              <a:t>자동 테스트 281건을 통과했습니다. 합성 필름으로 전 과정을 자동으로 점검합니다[1].</a:t>
             </a:r>
           </a:p>
           <a:p>
@@ -7047,7 +7043,7 @@
                 <a:ea typeface="Pretendard"/>
                 <a:cs typeface="Pretendard"/>
               </a:rPr>
-              <a:t>판정식 3종(누적 길이·기공 면적률은 100mm 구간 중 최악 구간 선택) · 기준표 판본 선택(판정표·PDF·기록에 기재) · 선급 보고 항목 충족률 n/25</a:t>
+              <a:t>판정식은 세 가지입니다. 누적 길이와 기공 면적률은 100mm 구간 중 가장 나쁜 구간으로 봅니다. 기준표 판본을 고르면 판정표와 PDF, 기록에 그대로 적히고, 선급 보고 항목 25개 중 채운 개수도 보여 줍니다.</a:t>
             </a:r>
           </a:p>
         </p:txBody>
@@ -7089,7 +7085,7 @@
                 <a:ea typeface="Pretendard"/>
                 <a:cs typeface="Pretendard"/>
               </a:rPr>
-              <a:t>본선까지 반드시 동작시킬 것(대체 경로 포함)</a:t>
+              <a:t>본선까지 꼭 돌릴 것(안 될 때 대안 포함)</a:t>
             </a:r>
           </a:p>
         </p:txBody>
@@ -7103,7 +7099,7 @@
         <p:spPr>
           <a:xfrm>
             <a:off x="8846820" y="2606040"/>
-            <a:ext cx="3451860" cy="1600200"/>
+            <a:ext cx="3451860" cy="1783080"/>
           </a:xfrm>
           <a:prstGeom prst="rect">
             <a:avLst/>
@@ -7138,7 +7134,7 @@
                 <a:ea typeface="Pretendard"/>
                 <a:cs typeface="Pretendard"/>
               </a:rPr>
-              <a:t>YOLO26s 학습 가중치 탑재 — 대체: RIAWELC 사전학습 + GDXray W0001·W0002 검증 → 그래도 불가 시 폴백 탐지기로 시연</a:t>
+              <a:t>YOLO26s 학습 가중치를 올립니다. 안 되면 RIAWELC로 사전학습하고 GDXray로 검증하며, 그래도 안 되면 지금 탐지기로 시연합니다.</a:t>
             </a:r>
           </a:p>
           <a:p>
@@ -7164,7 +7160,7 @@
                 <a:ea typeface="Pretendard"/>
                 <a:cs typeface="Pretendard"/>
               </a:rPr>
-              <a:t>기준표 실제 수치 확정(선급 지침·멘토링) — 대체: 공개 규격 구조의 데모 수치 유지, 조항 번호로 구분</a:t>
+              <a:t>기준표의 실제 수치를 확정합니다(선급 지침·멘토링). 안 되면 공개 규격 구조의 데모 수치를 쓰고 조항 번호로 구분합니다.</a:t>
             </a:r>
           </a:p>
           <a:p>
@@ -7190,7 +7186,7 @@
                 <a:ea typeface="Pretendard"/>
                 <a:cs typeface="Pretendard"/>
               </a:rPr>
-              <a:t>현직 판독원의 보고서 양식 검증 — 대체: IACS UR W33 §8 필수 항목[2]으로 자체 검증</a:t>
+              <a:t>현직 판독원에게 보고서 양식을 확인받습니다. 안 되면 선급 규칙(UR W33 §8)의 필수 항목으로 자체 점검합니다[2].</a:t>
             </a:r>
           </a:p>
         </p:txBody>
@@ -7204,7 +7200,7 @@
         <p:spPr>
           <a:xfrm>
             <a:off x="12893040" y="1371600"/>
-            <a:ext cx="4782311" cy="2971800"/>
+            <a:ext cx="4782311" cy="3154680"/>
           </a:xfrm>
           <a:prstGeom prst="roundRect">
             <a:avLst>
@@ -7347,7 +7343,7 @@
         <p:spPr>
           <a:xfrm>
             <a:off x="13213080" y="2560320"/>
-            <a:ext cx="1956815" cy="1645920"/>
+            <a:ext cx="1956815" cy="1828800"/>
           </a:xfrm>
           <a:prstGeom prst="rect">
             <a:avLst/>
@@ -7382,7 +7378,7 @@
                 <a:ea typeface="Pretendard"/>
                 <a:cs typeface="Pretendard"/>
               </a:rPr>
-              <a:t>4대 기능(2차 눈·2클릭 자+규칙 판정·소견서·기록) + 자연어 검색</a:t>
+              <a:t>네 기능(두 번째 눈, 클릭 두 번 자와 규칙 판정, 보고서, 기록)과 말로 검색</a:t>
             </a:r>
           </a:p>
           <a:p>
@@ -7408,7 +7404,7 @@
                 <a:ea typeface="Pretendard"/>
                 <a:cs typeface="Pretendard"/>
               </a:rPr>
-              <a:t>YOLO 학습 + GDXray 교차 검증 수치(검출률·장당 오탐) 공개</a:t>
+              <a:t>YOLO 학습과 GDXray 교차 검증 수치(검출률, 장당 헛짚음) 공개</a:t>
             </a:r>
           </a:p>
           <a:p>
@@ -7434,7 +7430,7 @@
                 <a:ea typeface="Pretendard"/>
                 <a:cs typeface="Pretendard"/>
               </a:rPr>
-              <a:t>오프라인 시연 모드(템플릿·캐시), PDF·CSV·JSON 백업</a:t>
+              <a:t>인터넷 없이 쓰는 시연 모드, PDF·CSV·JSON 백업</a:t>
             </a:r>
           </a:p>
         </p:txBody>
@@ -7490,7 +7486,7 @@
         <p:spPr>
           <a:xfrm>
             <a:off x="15398496" y="2560320"/>
-            <a:ext cx="1956815" cy="1645920"/>
+            <a:ext cx="1956815" cy="1828800"/>
           </a:xfrm>
           <a:prstGeom prst="rect">
             <a:avLst/>
@@ -7525,7 +7521,7 @@
                 <a:ea typeface="Pretendard"/>
                 <a:cs typeface="Pretendard"/>
               </a:rPr>
-              <a:t>취부(부재 맞대기 조립) 불량 예방 모듈, 폰 촬영 측정, AR 고글</a:t>
+              <a:t>조립 불량 예방 기능, 휴대폰 촬영 측정, AR 고글</a:t>
             </a:r>
           </a:p>
           <a:p>
@@ -7551,7 +7547,7 @@
                 <a:ea typeface="Pretendard"/>
                 <a:cs typeface="Pretendard"/>
               </a:rPr>
-              <a:t>위험도 샘플링 추천(검사 지점은 선급·선주·품질부서 권한)</a:t>
+              <a:t>검사 지점 추천(어디를 찍을지는 선급과 선주, 품질부서 권한)</a:t>
             </a:r>
           </a:p>
           <a:p>
@@ -7577,7 +7573,7 @@
                 <a:ea typeface="Pretendard"/>
                 <a:cs typeface="Pretendard"/>
               </a:rPr>
-              <a:t>재학습 파이프라인·초음파(UT) 판독·조선소 현장 파일럿 → 로드맵</a:t>
+              <a:t>재학습 자동화, 초음파 판독, 조선소 현장 시범 적용은 로드맵</a:t>
             </a:r>
           </a:p>
         </p:txBody>
@@ -7590,7 +7586,7 @@
         </p:nvSpPr>
         <p:spPr>
           <a:xfrm>
-            <a:off x="4800600" y="4572000"/>
+            <a:off x="4800600" y="4754880"/>
             <a:ext cx="7818120" cy="1508760"/>
           </a:xfrm>
           <a:prstGeom prst="roundRect">
@@ -7621,7 +7617,7 @@
         </p:nvSpPr>
         <p:spPr>
           <a:xfrm>
-            <a:off x="5120640" y="4855464"/>
+            <a:off x="5120640" y="5038344"/>
             <a:ext cx="146304" cy="146304"/>
           </a:xfrm>
           <a:prstGeom prst="ellipse">
@@ -7650,7 +7646,7 @@
         </p:nvSpPr>
         <p:spPr>
           <a:xfrm>
-            <a:off x="5367527" y="4754880"/>
+            <a:off x="5367527" y="4937760"/>
             <a:ext cx="6931152" cy="384048"/>
           </a:xfrm>
           <a:prstGeom prst="rect">
@@ -7691,7 +7687,7 @@
         </p:nvSpPr>
         <p:spPr>
           <a:xfrm>
-            <a:off x="5120640" y="5138928"/>
+            <a:off x="5120640" y="5321808"/>
             <a:ext cx="7178040" cy="868680"/>
           </a:xfrm>
           <a:prstGeom prst="rect">
@@ -7738,7 +7734,7 @@
                 <a:ea typeface="Pretendard"/>
                 <a:cs typeface="Pretendard"/>
               </a:rPr>
-              <a:t> — 기획·개발·데이터·디자인 전담</a:t>
+              <a:t>입니다. 기획과 개발, 데이터, 디자인을 모두 맡습니다.</a:t>
             </a:r>
           </a:p>
           <a:p>
@@ -7764,7 +7760,7 @@
                 <a:ea typeface="Pretendard"/>
                 <a:cs typeface="Pretendard"/>
               </a:rPr>
-              <a:t>보유 경험: YOLO 결함 탐지(랩실)·LLM 파이프라인 프로토타입 / 적용 스택: Python·Streamlit·OpenCV·SQLite</a:t>
+              <a:t>경험은 YOLO 결함 탐지(랩실)와 LLM 파이프라인 시제품입니다. Python, Streamlit, OpenCV, SQLite를 씁니다.</a:t>
             </a:r>
           </a:p>
           <a:p>
@@ -7790,7 +7786,7 @@
                 <a:ea typeface="Pretendard"/>
                 <a:cs typeface="Pretendard"/>
               </a:rPr>
-              <a:t>외부 자원(본선 진출 시): 도메인 멘토링 2회(기준 원문·보고서 양식), 기술 멘토링 2회(모델 성능·UX·리허설), 현직자 오픈카톡</a:t>
+              <a:t>본선에서는 멘토링 네 번으로 기준 원문과 보고서 양식, 모델 성능과 화면을 보완하겠습니다.</a:t>
             </a:r>
           </a:p>
         </p:txBody>
@@ -7803,8 +7799,8 @@
         </p:nvSpPr>
         <p:spPr>
           <a:xfrm>
-            <a:off x="4800600" y="6309360"/>
-            <a:ext cx="7818120" cy="2944367"/>
+            <a:off x="4800600" y="6492240"/>
+            <a:ext cx="7818120" cy="2761487"/>
           </a:xfrm>
           <a:prstGeom prst="roundRect">
             <a:avLst>
@@ -7834,7 +7830,7 @@
         </p:nvSpPr>
         <p:spPr>
           <a:xfrm>
-            <a:off x="5120640" y="6638544"/>
+            <a:off x="5120640" y="6821424"/>
             <a:ext cx="146304" cy="146304"/>
           </a:xfrm>
           <a:prstGeom prst="ellipse">
@@ -7863,7 +7859,7 @@
         </p:nvSpPr>
         <p:spPr>
           <a:xfrm>
-            <a:off x="5367527" y="6537960"/>
+            <a:off x="5367527" y="6720840"/>
             <a:ext cx="6931152" cy="384048"/>
           </a:xfrm>
           <a:prstGeom prst="rect">
@@ -7904,7 +7900,7 @@
         </p:nvSpPr>
         <p:spPr>
           <a:xfrm>
-            <a:off x="5120640" y="6931152"/>
+            <a:off x="5120640" y="7114031"/>
             <a:ext cx="1657350" cy="731520"/>
           </a:xfrm>
           <a:prstGeom prst="roundRect">
@@ -7933,7 +7929,7 @@
         </p:nvSpPr>
         <p:spPr>
           <a:xfrm>
-            <a:off x="5230368" y="7031736"/>
+            <a:off x="5230368" y="7214616"/>
             <a:ext cx="310896" cy="310896"/>
           </a:xfrm>
           <a:prstGeom prst="roundRect">
@@ -7975,7 +7971,7 @@
         </p:nvSpPr>
         <p:spPr>
           <a:xfrm>
-            <a:off x="5623559" y="7004304"/>
+            <a:off x="5623559" y="7187183"/>
             <a:ext cx="1062990" cy="621792"/>
           </a:xfrm>
           <a:prstGeom prst="rect">
@@ -8003,7 +7999,7 @@
                 <a:ea typeface="Pretendard"/>
                 <a:cs typeface="Pretendard"/>
               </a:rPr>
-              <a:t>사진 열기(스캔 필름) · 대비 향상</a:t>
+              <a:t>스캔한 필름 사진 열기, 대비 높이기</a:t>
             </a:r>
           </a:p>
         </p:txBody>
@@ -8016,7 +8012,7 @@
         </p:nvSpPr>
         <p:spPr>
           <a:xfrm>
-            <a:off x="6960870" y="6931152"/>
+            <a:off x="6960870" y="7114031"/>
             <a:ext cx="1657350" cy="731520"/>
           </a:xfrm>
           <a:prstGeom prst="roundRect">
@@ -8045,7 +8041,7 @@
         </p:nvSpPr>
         <p:spPr>
           <a:xfrm>
-            <a:off x="7070598" y="7031736"/>
+            <a:off x="7070598" y="7214616"/>
             <a:ext cx="310896" cy="310896"/>
           </a:xfrm>
           <a:prstGeom prst="roundRect">
@@ -8087,7 +8083,7 @@
         </p:nvSpPr>
         <p:spPr>
           <a:xfrm>
-            <a:off x="7463790" y="7004304"/>
+            <a:off x="7463790" y="7187183"/>
             <a:ext cx="1062990" cy="621792"/>
           </a:xfrm>
           <a:prstGeom prst="rect">
@@ -8115,7 +8111,7 @@
                 <a:ea typeface="Pretendard"/>
                 <a:cs typeface="Pretendard"/>
               </a:rPr>
-              <a:t>AI 후보 표시 → 종류 확정·채택 / 오탐 기각</a:t>
+              <a:t>AI 후보 표시, 종류 확정해 채택하거나 기각</a:t>
             </a:r>
           </a:p>
         </p:txBody>
@@ -8128,7 +8124,7 @@
         </p:nvSpPr>
         <p:spPr>
           <a:xfrm>
-            <a:off x="8801100" y="6931152"/>
+            <a:off x="8801100" y="7114031"/>
             <a:ext cx="1657350" cy="731520"/>
           </a:xfrm>
           <a:prstGeom prst="roundRect">
@@ -8157,7 +8153,7 @@
         </p:nvSpPr>
         <p:spPr>
           <a:xfrm>
-            <a:off x="8910828" y="7031736"/>
+            <a:off x="8910828" y="7214616"/>
             <a:ext cx="310896" cy="310896"/>
           </a:xfrm>
           <a:prstGeom prst="roundRect">
@@ -8199,7 +8195,7 @@
         </p:nvSpPr>
         <p:spPr>
           <a:xfrm>
-            <a:off x="9304020" y="7004304"/>
+            <a:off x="9304020" y="7187183"/>
             <a:ext cx="1062990" cy="621792"/>
           </a:xfrm>
           <a:prstGeom prst="rect">
@@ -8227,7 +8223,7 @@
                 <a:ea typeface="Pretendard"/>
                 <a:cs typeface="Pretendard"/>
               </a:rPr>
-              <a:t>납마커 양 끝 클릭 두 번 → mm/픽셀 확정</a:t>
+              <a:t>납마커 양 끝 클릭해 mm/픽셀 확정</a:t>
             </a:r>
           </a:p>
         </p:txBody>
@@ -8240,7 +8236,7 @@
         </p:nvSpPr>
         <p:spPr>
           <a:xfrm>
-            <a:off x="10641330" y="6931152"/>
+            <a:off x="10641330" y="7114031"/>
             <a:ext cx="1657350" cy="731520"/>
           </a:xfrm>
           <a:prstGeom prst="roundRect">
@@ -8269,7 +8265,7 @@
         </p:nvSpPr>
         <p:spPr>
           <a:xfrm>
-            <a:off x="10751057" y="7031736"/>
+            <a:off x="10751057" y="7214616"/>
             <a:ext cx="310896" cy="310896"/>
           </a:xfrm>
           <a:prstGeom prst="roundRect">
@@ -8311,7 +8307,7 @@
         </p:nvSpPr>
         <p:spPr>
           <a:xfrm>
-            <a:off x="11144250" y="7004304"/>
+            <a:off x="11144250" y="7187183"/>
             <a:ext cx="1062990" cy="621792"/>
           </a:xfrm>
           <a:prstGeom prst="rect">
@@ -8339,7 +8335,7 @@
                 <a:ea typeface="Pretendard"/>
                 <a:cs typeface="Pretendard"/>
               </a:rPr>
-              <a:t>결함 양 끝 클릭 두 번 → 크기 확정</a:t>
+              <a:t>결함 양 끝 클릭해 크기 확정</a:t>
             </a:r>
           </a:p>
         </p:txBody>
@@ -8352,7 +8348,7 @@
         </p:nvSpPr>
         <p:spPr>
           <a:xfrm>
-            <a:off x="5120640" y="7772400"/>
+            <a:off x="5120640" y="7955279"/>
             <a:ext cx="1657350" cy="731520"/>
           </a:xfrm>
           <a:prstGeom prst="roundRect">
@@ -8381,7 +8377,7 @@
         </p:nvSpPr>
         <p:spPr>
           <a:xfrm>
-            <a:off x="5230368" y="7872983"/>
+            <a:off x="5230368" y="8055863"/>
             <a:ext cx="310896" cy="310896"/>
           </a:xfrm>
           <a:prstGeom prst="roundRect">
@@ -8423,7 +8419,7 @@
         </p:nvSpPr>
         <p:spPr>
           <a:xfrm>
-            <a:off x="5623559" y="7845552"/>
+            <a:off x="5623559" y="8028431"/>
             <a:ext cx="1062990" cy="621792"/>
           </a:xfrm>
           <a:prstGeom prst="rect">
@@ -8451,7 +8447,7 @@
                 <a:ea typeface="Pretendard"/>
                 <a:cs typeface="Pretendard"/>
               </a:rPr>
-              <a:t>판정 실행 → 단일·누적·면적률 + 근거 조항</a:t>
+              <a:t>판정 실행, 길이·누적·면적률과 근거 조항 확인</a:t>
             </a:r>
           </a:p>
         </p:txBody>
@@ -8464,7 +8460,7 @@
         </p:nvSpPr>
         <p:spPr>
           <a:xfrm>
-            <a:off x="6960870" y="7772400"/>
+            <a:off x="6960870" y="7955279"/>
             <a:ext cx="1657350" cy="731520"/>
           </a:xfrm>
           <a:prstGeom prst="roundRect">
@@ -8493,7 +8489,7 @@
         </p:nvSpPr>
         <p:spPr>
           <a:xfrm>
-            <a:off x="7070598" y="7872983"/>
+            <a:off x="7070598" y="8055863"/>
             <a:ext cx="310896" cy="310896"/>
           </a:xfrm>
           <a:prstGeom prst="roundRect">
@@ -8535,7 +8531,7 @@
         </p:nvSpPr>
         <p:spPr>
           <a:xfrm>
-            <a:off x="7463790" y="7845552"/>
+            <a:off x="7463790" y="8028431"/>
             <a:ext cx="1062990" cy="621792"/>
           </a:xfrm>
           <a:prstGeom prst="rect">
@@ -8563,7 +8559,7 @@
                 <a:ea typeface="Pretendard"/>
                 <a:cs typeface="Pretendard"/>
               </a:rPr>
-              <a:t>소견서 초안 → 편집 → 승인 · PDF</a:t>
+              <a:t>보고서 초안 만들고 고쳐서 승인, PDF 저장</a:t>
             </a:r>
           </a:p>
         </p:txBody>
@@ -8576,7 +8572,7 @@
         </p:nvSpPr>
         <p:spPr>
           <a:xfrm>
-            <a:off x="8801100" y="7772400"/>
+            <a:off x="8801100" y="7955279"/>
             <a:ext cx="1657350" cy="731520"/>
           </a:xfrm>
           <a:prstGeom prst="roundRect">
@@ -8605,7 +8601,7 @@
         </p:nvSpPr>
         <p:spPr>
           <a:xfrm>
-            <a:off x="8910828" y="7872983"/>
+            <a:off x="8910828" y="8055863"/>
             <a:ext cx="310896" cy="310896"/>
           </a:xfrm>
           <a:prstGeom prst="roundRect">
@@ -8647,7 +8643,7 @@
         </p:nvSpPr>
         <p:spPr>
           <a:xfrm>
-            <a:off x="9304020" y="7845552"/>
+            <a:off x="9304020" y="8028431"/>
             <a:ext cx="1062990" cy="621792"/>
           </a:xfrm>
           <a:prstGeom prst="rect">
@@ -8675,7 +8671,7 @@
                 <a:ea typeface="Pretendard"/>
                 <a:cs typeface="Pretendard"/>
               </a:rPr>
-              <a:t>말로 ‘3번 블록 기공 이력’ 검색·요약</a:t>
+              <a:t>말로 ‘3번 블록 기공 이력’ 검색</a:t>
             </a:r>
           </a:p>
         </p:txBody>
@@ -8688,7 +8684,7 @@
         </p:nvSpPr>
         <p:spPr>
           <a:xfrm>
-            <a:off x="10641330" y="7772400"/>
+            <a:off x="10641330" y="7955279"/>
             <a:ext cx="1657350" cy="731520"/>
           </a:xfrm>
           <a:prstGeom prst="roundRect">
@@ -8717,7 +8713,7 @@
         </p:nvSpPr>
         <p:spPr>
           <a:xfrm>
-            <a:off x="10751057" y="7872983"/>
+            <a:off x="10751057" y="8055863"/>
             <a:ext cx="310896" cy="310896"/>
           </a:xfrm>
           <a:prstGeom prst="roundRect">
@@ -8759,7 +8755,7 @@
         </p:nvSpPr>
         <p:spPr>
           <a:xfrm>
-            <a:off x="11144250" y="7845552"/>
+            <a:off x="11144250" y="8028431"/>
             <a:ext cx="1062990" cy="621792"/>
           </a:xfrm>
           <a:prstGeom prst="rect">
@@ -8787,7 +8783,7 @@
                 <a:ea typeface="Pretendard"/>
                 <a:cs typeface="Pretendard"/>
               </a:rPr>
-              <a:t>채택률·미탐 지표 확인 · 학습 라벨 내보내기</a:t>
+              <a:t>채택률과 놓침 지표 확인, 학습 라벨 내보내기</a:t>
             </a:r>
           </a:p>
         </p:txBody>
@@ -8828,7 +8824,7 @@
                 <a:ea typeface="Pretendard"/>
                 <a:cs typeface="Pretendard"/>
               </a:rPr>
-              <a:t>균열 포함 불합격 1건 + 무결함 합격 1건을 합성 RT 필름으로 시연(실제 필름은 현장 보안 통제로 기간 내 확보 곤란). 화면의 후보 박스는 폴백 탐지기 출력이며, 측정에 쓴 신뢰도 기준 0.5는 프로그램 내부값(화면 슬라이더는 표시 필터)</a:t>
+              <a:t>균열이 있는 불합격 1건과 흠 없는 합격 1건을 합성 RT 필름으로 시연합니다. 실제 필름은 현장 보안 때문에 기간 안에 구하기 어렵습니다. 화면의 후보 상자는 대체 탐지기 결과이고, 측정에 쓴 신뢰도 기준 0.5는 프로그램 내부값입니다.</a:t>
             </a:r>
           </a:p>
         </p:txBody>
@@ -8841,8 +8837,8 @@
         </p:nvSpPr>
         <p:spPr>
           <a:xfrm>
-            <a:off x="12893040" y="4572000"/>
-            <a:ext cx="4782311" cy="4681727"/>
+            <a:off x="12893040" y="4754880"/>
+            <a:ext cx="4782311" cy="4498847"/>
           </a:xfrm>
           <a:prstGeom prst="roundRect">
             <a:avLst>
@@ -8872,7 +8868,7 @@
         </p:nvSpPr>
         <p:spPr>
           <a:xfrm>
-            <a:off x="13213080" y="4800600"/>
+            <a:off x="13213080" y="4983480"/>
             <a:ext cx="4142231" cy="292608"/>
           </a:xfrm>
           <a:prstGeom prst="rect">
@@ -8921,8 +8917,8 @@
         </p:blipFill>
         <p:spPr>
           <a:xfrm>
-            <a:off x="13213080" y="5193792"/>
-            <a:ext cx="4142231" cy="3447287"/>
+            <a:off x="13213080" y="5376672"/>
+            <a:ext cx="4142231" cy="3264407"/>
           </a:xfrm>
           <a:prstGeom prst="rect">
             <a:avLst/>
@@ -8970,7 +8966,7 @@
                 <a:ea typeface="Pretendard"/>
                 <a:cs typeface="Pretendard"/>
               </a:rPr>
-              <a:t>앱 실제 화면(2026.09.09판) — 합성 RT 필름 · AI 후보 오버레이(주황) · 클릭 도구(캘리브레이션·측정·후보 추가) · 결함 후보 목록(유형 확정·채택/기각)</a:t>
+              <a:t>앱 실제 화면(2026.09.09판) · 합성 RT 필름에 AI 후보를 주황색으로 표시 · 왼쪽은 클릭 도구, 아래는 결함 후보 목록(종류 확정·채택·기각)</a:t>
             </a:r>
           </a:p>
         </p:txBody>
@@ -9011,7 +9007,7 @@
                 <a:ea typeface="Pretendard"/>
                 <a:cs typeface="Pretendard"/>
               </a:rPr>
-              <a:t>참고  [1] rt-workbench 저장소(2026.09 — 자동 테스트 tests/ · E2E scripts/demo_e2e.py · 탐지 측정 scripts/eval_detector.py)  ·  [2] IACS UR W33 Rev.1/Corr.1(2021) §8.2·§8.5  ·  화면은 앱 실제 캡처(2026.09.09판: 클릭 도구·AI 후보 오버레이·결함 후보 목록)</a:t>
+              <a:t>참고  [1] rt-workbench 저장소(2026.09 기준: 자동 테스트 tests/ · 전 과정 점검 scripts/demo_e2e.py · 탐지 측정 scripts/eval_detector.py)  ·  [2] IACS UR W33 Rev.1/Corr.1(2021) §8.2·§8.5  ·  화면은 앱을 실제로 캡처한 것입니다(2026.09.09판).</a:t>
             </a:r>
           </a:p>
         </p:txBody>
@@ -9864,7 +9860,7 @@
                 <a:ea typeface="Pretendard"/>
                 <a:cs typeface="Pretendard"/>
               </a:rPr>
-              <a:t>「창원 지역 특화산업 고도화 및 디지털 전환 촉진을 위한 용접 AI 학습 데이터」 — 강재(RT·VT=육안검사)·알루미늄(RT) 용접 사진 144,019장(이 중 RT 70,000장; 데이터셋 페이지 기준 수치), 결함 영역 폴리곤 라벨(JSON), 공식 예시 모델 YOLOv5x-seg</a:t>
+              <a:t>「창원 지역 특화산업 고도화 및 디지털 전환 촉진을 위한 용접 AI 학습 데이터」입니다. 강재와 알루미늄 용접 사진 144,019장이고, 그중 RT 사진이 70,000장입니다(데이터셋 페이지 기준). 결함 자리를 다각형으로 그린 라벨이 함께 있고, 공식 예시 모델은 YOLOv5x-seg입니다.</a:t>
             </a:r>
           </a:p>
         </p:txBody>
@@ -10061,7 +10057,7 @@
                 <a:ea typeface="Pretendard"/>
                 <a:cs typeface="Pretendard"/>
               </a:rPr>
-              <a:t>224×224(문서상 규격) 조각 사진 24,407장. 4종 분류: 균열 7,635 · 기공(용접 속 기포 구멍) 6,320 · 용입부족(쇳물이 이음매 뿌리까지 차지 않은 상태) 4,452 · 정상 6,000(종류 이름 대응은 문헌 기준, 원저자 확인 예정). 결함 위치 박스 없음, 2000×8640 산업 원본에서 잘라낸 조각</a:t>
+              <a:t>224×224 크기로 잘라 놓은 사진 24,407장입니다. 균열 7,635장, 기공 6,320장, 용입부족 4,452장, 정상 6,000장으로 나뉩니다. 기공은 용접 속 기포 구멍이고, 용입부족은 쇳물이 이음매 뿌리까지 차지 않은 상태입니다. 결함 위치 상자는 없고, 2000×8640 산업용 원본에서 잘라낸 조각입니다.</a:t>
             </a:r>
           </a:p>
         </p:txBody>
@@ -10258,7 +10254,7 @@
                 <a:ea typeface="Pretendard"/>
                 <a:cs typeface="Pretendard"/>
               </a:rPr>
-              <a:t>3시리즈 88장 — W0001 원본 10장 + W0002 정답 마스크 10장(결함 641개의 박스·흑백 정답 이미지), W0003 독일 BAM 연구소의 기관 간 비교시험 필름 68장(논문 표 기준, 본문은 67장; 촬영 규격 ISO 17636-1 A급, 스캔 규격 ISO 14096-2 DB급) · 연구·교육 목적만</a:t>
+              <a:t>세 묶음 88장입니다. 원본 10장(W0001), 정답 마스크 10장(W0002, 결함 641개의 상자와 흑백 정답), 독일 BAM 연구소 비교시험 필름 68장(W0003)으로 이뤄져 있습니다(논문 표 기준, 본문은 67장. 촬영 ISO 17636-1 A급, 스캔 ISO 14096-2 DB급). 연구와 교육 목적으로만 쓸 수 있습니다.</a:t>
             </a:r>
           </a:p>
         </p:txBody>
@@ -10341,7 +10337,7 @@
                 <a:ea typeface="Pretendard"/>
                 <a:cs typeface="Pretendard"/>
               </a:rPr>
-              <a:t>3종 모두 실존 확인(수치는 논문·README·신청 확인 기준). AI Hub 폴리곤 라벨은 YOLO 박스로 변환, RIAWELC는 위치 정보가 없어 분류 사전학습에만 사용. AI Hub는 내국인 활용 신청·승인 필요·국외 반출 금지·출처 표기 의무[3], GDXray는 상업 이용 금지[1], RIAWELC는 공개된 학습·테스트 나눔에 같은 원본의 조각이 섞여 있어 원본 단위로 다시 나눠 쓴다(배포 아카이브 파일명 자체 집계 기준)</a:t>
+              <a:t>세 가지 모두 실제로 있는 데이터이고, 수치는 논문과 README, 신청 화면에서 확인했습니다. AI Hub 라벨은 YOLO 상자로 바꿔 쓰고, RIAWELC는 위치 정보가 없어 분류 사전학습에만 씁니다. AI Hub는 내국인 신청·승인이 필요하고 국외 반출이 금지되며 출처를 밝혀야 합니다[3]. GDXray는 상업 이용이 금지됩니다[1]. RIAWELC는 공개된 학습·테스트 묶음에 같은 원본의 조각이 섞여 있어, 원본 단위로 다시 나눠 씁니다.</a:t>
             </a:r>
           </a:p>
         </p:txBody>
@@ -10502,7 +10498,7 @@
                 <a:ea typeface="Pretendard"/>
                 <a:cs typeface="Pretendard"/>
               </a:rPr>
-              <a:t>: AI Hub는 내국인 활용 신청·승인이 필요하다(승인 수일). 일부 검색 결과는 이 데이터셋을 국방데이터로 분류해 별도 승인을 언급하므로 </a:t>
+              <a:t>를 씁니다. AI Hub는 내국인 신청과 승인이 필요하고 며칠 걸립니다. 일부 검색 결과는 이 데이터를 국방데이터로 분류해 별도 승인을 언급하므로, </a:t>
             </a:r>
             <a:r>
               <a:rPr sz="1160" b="1" i="0">
@@ -10513,7 +10509,7 @@
                 <a:ea typeface="Pretendard"/>
                 <a:cs typeface="Pretendard"/>
               </a:rPr>
-              <a:t>신청 시 접근 가능 여부를 먼저 확인</a:t>
+              <a:t>신청할 때 접근이 되는지부터 확인</a:t>
             </a:r>
             <a:r>
               <a:rPr sz="1160" b="0" i="0">
@@ -10524,7 +10520,7 @@
                 <a:ea typeface="Pretendard"/>
                 <a:cs typeface="Pretendard"/>
               </a:rPr>
-              <a:t>한다. RIAWELC·GDXray는 직접 내려받는다</a:t>
+              <a:t>하겠습니다. RIAWELC와 GDXray는 바로 내려받습니다.</a:t>
             </a:r>
           </a:p>
           <a:p>
@@ -10561,7 +10557,7 @@
                 <a:ea typeface="Pretendard"/>
                 <a:cs typeface="Pretendard"/>
               </a:rPr>
-              <a:t>: 개발·시연용 합성 RT 필름 생성기(기준물·결함 심기) — 프로토타입에 포함, 탐지 성능 측정에 사용</a:t>
+              <a:t>도 씁니다. 개발과 시연용으로 합성 RT 필름을 만드는 기능이 프로토타입에 들어 있고, 탐지 성능 측정에 씁니다.</a:t>
             </a:r>
           </a:p>
           <a:p>
@@ -10587,7 +10583,7 @@
                 <a:ea typeface="Pretendard"/>
                 <a:cs typeface="Pretendard"/>
               </a:rPr>
-              <a:t>자체 축적</a:t>
+              <a:t>직접 쌓는 데이터</a:t>
             </a:r>
             <a:r>
               <a:rPr sz="1160" b="0" i="0">
@@ -10598,7 +10594,7 @@
                 <a:ea typeface="Pretendard"/>
                 <a:cs typeface="Pretendard"/>
               </a:rPr>
-              <a:t>: 채택·직접 추가한 결함 박스가 학습 라벨로 내보내지는 구조 — 데이터는 검사업체·조선소 소유, 반출 없이 사내 보관</a:t>
+              <a:t>가 있습니다. 채택하거나 직접 그린 결함 상자가 학습용 라벨로 나옵니다. 데이터는 검사업체와 조선소 것이고 밖으로 내보내지 않습니다.</a:t>
             </a:r>
           </a:p>
           <a:p>
@@ -10624,7 +10620,7 @@
                 <a:ea typeface="Pretendard"/>
                 <a:cs typeface="Pretendard"/>
               </a:rPr>
-              <a:t>필름 스캔 전제</a:t>
+              <a:t>필름 스캔이 전제</a:t>
             </a:r>
             <a:r>
               <a:rPr sz="1160" b="0" i="0">
@@ -10635,7 +10631,7 @@
                 <a:ea typeface="Pretendard"/>
                 <a:cs typeface="Pretendard"/>
               </a:rPr>
-              <a:t>: 필름 스캐너는 3만 달러급 장비(판매점 가격 기준[8]) → 조직 공용 장비 또는 국내 RT 필름 스캔 서비스로 확보</a:t>
+              <a:t>입니다. 필름 스캐너는 3만 달러급 장비라[8], 조직이 함께 쓰거나 국내 스캔 서비스를 이용합니다. 스캔 화질 기준은 ISO 14096-2를 따릅니다.</a:t>
             </a:r>
           </a:p>
         </p:txBody>
@@ -10785,7 +10781,7 @@
                 <a:ea typeface="Pretendard"/>
                 <a:cs typeface="Pretendard"/>
               </a:rPr>
-              <a:t>AI Hub 접근 제한·라벨 변환 실패 시 </a:t>
+              <a:t>AI Hub를 못 쓰거나 라벨 변환이 안 되면 </a:t>
             </a:r>
             <a:r>
               <a:rPr sz="1160" b="1" i="0">
@@ -10796,7 +10792,7 @@
                 <a:ea typeface="Pretendard"/>
                 <a:cs typeface="Pretendard"/>
               </a:rPr>
-              <a:t>RIAWELC 사전학습 + GDXray W0001·W0002(결함 641개 박스+정답) 탐지 검증</a:t>
+              <a:t>RIAWELC로 사전학습하고 GDXray의 결함 641개 상자로 탐지를 검증</a:t>
             </a:r>
             <a:r>
               <a:rPr sz="1160" b="0" i="0">
@@ -10807,7 +10803,7 @@
                 <a:ea typeface="Pretendard"/>
                 <a:cs typeface="Pretendard"/>
               </a:rPr>
-              <a:t>으로 대체. 폴리곤 라벨 공개 데이터 SWRD(2025, 3,600장 이상)[7]도 후보(라이선스 확인 후)</a:t>
+              <a:t>합니다. 다각형 라벨이 공개된 SWRD(2025, 3,600장 이상)[7]도 라이선스를 확인한 뒤 후보로 봅니다.</a:t>
             </a:r>
           </a:p>
           <a:p>
@@ -10833,7 +10829,7 @@
                 <a:ea typeface="Pretendard"/>
                 <a:cs typeface="Pretendard"/>
               </a:rPr>
-              <a:t>실제 조선소 필름은 보안 통제로 기간 내 확보 곤란 → 공개 데이터 + 합성 필름으로 시연하고 </a:t>
+              <a:t>실제 조선소 필름은 보안 때문에 기간 안에 구하기 어렵습니다. 공개 데이터와 합성 필름으로 시연하고, </a:t>
             </a:r>
             <a:r>
               <a:rPr sz="1160" b="1" i="0">
@@ -10844,7 +10840,18 @@
                 <a:ea typeface="Pretendard"/>
                 <a:cs typeface="Pretendard"/>
               </a:rPr>
-              <a:t>현장 파일럿 필요를 명시</a:t>
+              <a:t>현장 시범 적용이 필요하다는 점을 분명히 적겠습니다</a:t>
+            </a:r>
+            <a:r>
+              <a:rPr sz="1160" b="0" i="0">
+                <a:solidFill>
+                  <a:srgbClr val="1F2A44"/>
+                </a:solidFill>
+                <a:latin typeface="Pretendard"/>
+                <a:ea typeface="Pretendard"/>
+                <a:cs typeface="Pretendard"/>
+              </a:rPr>
+              <a:t>.</a:t>
             </a:r>
           </a:p>
           <a:p>
@@ -10881,7 +10888,7 @@
                 <a:ea typeface="Pretendard"/>
                 <a:cs typeface="Pretendard"/>
               </a:rPr>
-              <a:t>검출률(재현율) 우선</a:t>
+              <a:t>놓치지 않는 것이 먼저</a:t>
             </a:r>
             <a:r>
               <a:rPr sz="1160" b="0" i="0">
@@ -10892,7 +10899,7 @@
                 <a:ea typeface="Pretendard"/>
                 <a:cs typeface="Pretendard"/>
               </a:rPr>
-              <a:t>: 실제로 쓸 신뢰도 기준에서 검출률 ≥ 95%, 장당 오탐 ≤ 5건(AI Hub RT 테스트셋). mAP(탐지 정확도 종합 지표)는 보조</a:t>
+              <a:t>입니다. 실제로 쓸 신뢰도 기준에서 검출률 95% 이상, 장당 헛짚음 5건 이하를 목표로 합니다. 종합 점수인 mAP는 참고로만 봅니다.</a:t>
             </a:r>
           </a:p>
           <a:p>
@@ -10918,7 +10925,7 @@
                 <a:ea typeface="Pretendard"/>
                 <a:cs typeface="Pretendard"/>
               </a:rPr>
-              <a:t>문헌은 자체·정제 데이터셋에서 mAP@0.5 95~97%[6][7], 강관 X-ray 세트는 99%[7]까지 보고하지만, 같은 계열 공개 데이터(SWRD)의 기본 학습 베이스라인은 0.66에 그친다[7]. 학습 데이터와 다른 데이터셋에 미세조정 없이 적용하면 분류 macro-F1이 약 64%로 떨어졌고[4], 별도 보고에서는 같은 분류기가 정제 데이터셋 98.75%·GDXray 90.3%·저화질 사설 데이터셋 75.8%로 데이터 품질에 따라 갈렸다[5] → </a:t>
+              <a:t>논문들은 자체 데이터에서 mAP 95~97%[6][7], 강관 X-ray에서는 99%[7]까지 보고합니다. 하지만 같은 계열 공개 데이터의 기본 학습 점수는 0.66에 그쳤고[7], 배운 적 없는 데이터에 그대로 쓰면 분류 점수가 64%까지 떨어졌습니다[4]. 다른 보고에서도 같은 분류기가 정제 데이터 98.75%, GDXray 90.3%, 저화질 데이터 75.8%로 갈렸습니다[5]. 그래서 </a:t>
             </a:r>
             <a:r>
               <a:rPr sz="1160" b="1" i="0">
@@ -10929,7 +10936,18 @@
                 <a:ea typeface="Pretendard"/>
                 <a:cs typeface="Pretendard"/>
               </a:rPr>
-              <a:t>한계까지 측정·공개</a:t>
+              <a:t>한계까지 재서 그대로 공개</a:t>
+            </a:r>
+            <a:r>
+              <a:rPr sz="1160" b="0" i="0">
+                <a:solidFill>
+                  <a:srgbClr val="1F2A44"/>
+                </a:solidFill>
+                <a:latin typeface="Pretendard"/>
+                <a:ea typeface="Pretendard"/>
+                <a:cs typeface="Pretendard"/>
+              </a:rPr>
+              <a:t>하겠습니다.</a:t>
             </a:r>
           </a:p>
         </p:txBody>
@@ -10970,7 +10988,7 @@
                 <a:ea typeface="Pretendard"/>
                 <a:cs typeface="Pretendard"/>
               </a:rPr>
-              <a:t>참고  [1] Mery 외, J Nondestruct Eval 34:42(2015)  ·  [2] RIAWELC GitHub README · Totino·Spagnolo·Perri 2022/2023†  ·  [3] AI Hub 71761 활용 신청 확인 자료·이용정책†  ·  [4] WeldVGG, Sensors 25(19):6183(2025)†  ·  [5] Palma-Ramírez 외, Heliyon 2024 e30590†  ·  [6] Lu 외, J Nondestruct Eval 44:91(2025, GDXray mAP@0.5 97.2%)†  ·  [7] MGDR-YOLO, Sensors 2026 · DSF-YOLO, Sci Rep 2025 · SWRD, J Nondestruct Eval 2025†  ·  [8] VIDAR NDT PRO 판매점 가격†  ·  † 검색 요약 기준</a:t>
+              <a:t>참고  [1] Mery 외, J Nondestruct Eval 34:42(2015)  ·  [2] RIAWELC GitHub README · Totino·Spagnolo·Perri 2022/2023†  ·  [3] AI Hub 71761 활용 신청 화면·이용정책†  ·  [4] WeldVGG, Sensors 25(19):6183(2025)†  ·  [5] Palma-Ramírez 외, Heliyon 2024 e30590†  ·  [6] Lu 외, J Nondestruct Eval 44:91(2025, GDXray mAP@0.5 97.2%)†  ·  [7] MGDR-YOLO, Sensors 2026 · DSF-YOLO, Sci Rep 2025 · SWRD, J Nondestruct Eval 2025†  ·  [8] VIDAR NDT PRO 판매점 가격†  ·  †는 검색 요약으로 확인한 자료입니다.</a:t>
             </a:r>
           </a:p>
         </p:txBody>
@@ -11688,6 +11706,17 @@
               <a:buChar char="•"/>
             </a:pPr>
             <a:r>
+              <a:rPr sz="1200" b="1" i="0">
+                <a:solidFill>
+                  <a:srgbClr val="1F2A44"/>
+                </a:solidFill>
+                <a:latin typeface="Pretendard"/>
+                <a:ea typeface="Pretendard"/>
+                <a:cs typeface="Pretendard"/>
+              </a:rPr>
+              <a:t>서류 쓰기와 서류 찾기가 사라집니다.</a:t>
+            </a:r>
+            <a:r>
               <a:rPr sz="1200" b="0" i="0">
                 <a:solidFill>
                   <a:srgbClr val="1F2A44"/>
@@ -11696,29 +11725,7 @@
                 <a:ea typeface="Pretendard"/>
                 <a:cs typeface="Pretendard"/>
               </a:rPr>
-              <a:t>판독원의 </a:t>
-            </a:r>
-            <a:r>
-              <a:rPr sz="1200" b="1" i="0">
-                <a:solidFill>
-                  <a:srgbClr val="1F2A44"/>
-                </a:solidFill>
-                <a:latin typeface="Pretendard"/>
-                <a:ea typeface="Pretendard"/>
-                <a:cs typeface="Pretendard"/>
-              </a:rPr>
-              <a:t>문서·서류 검색 노동 제거</a:t>
-            </a:r>
-            <a:r>
-              <a:rPr sz="1200" b="0" i="0">
-                <a:solidFill>
-                  <a:srgbClr val="1F2A44"/>
-                </a:solidFill>
-                <a:latin typeface="Pretendard"/>
-                <a:ea typeface="Pretendard"/>
-                <a:cs typeface="Pretendard"/>
-              </a:rPr>
-              <a:t> → 자격자가 판독에 집중. 인력이 줄고[2] 숙련자 확보가 어려운[3] 국면에서 1인당 처리량 향상(앱이 기록한 소요시간과 수기 기준선으로 실측)</a:t>
+              <a:t> 판독원은 판독에 집중합니다. 인력이 줄고[2] 숙련자를 구하기 어려운[3] 상황에서 한 사람이 처리하는 양이 늘어납니다. 늘어난 양은 앱이 기록한 소요시간과 손으로 하던 시간을 비교해 확인합니다.</a:t>
             </a:r>
           </a:p>
           <a:p>
@@ -11736,6 +11743,17 @@
               <a:buChar char="•"/>
             </a:pPr>
             <a:r>
+              <a:rPr sz="1200" b="1" i="0">
+                <a:solidFill>
+                  <a:srgbClr val="1F2A44"/>
+                </a:solidFill>
+                <a:latin typeface="Pretendard"/>
+                <a:ea typeface="Pretendard"/>
+                <a:cs typeface="Pretendard"/>
+              </a:rPr>
+              <a:t>검사 기록이 자산이 됩니다.</a:t>
+            </a:r>
+            <a:r>
               <a:rPr sz="1200" b="0" i="0">
                 <a:solidFill>
                   <a:srgbClr val="1F2A44"/>
@@ -11744,29 +11762,7 @@
                 <a:ea typeface="Pretendard"/>
                 <a:cs typeface="Pretendard"/>
               </a:rPr>
-              <a:t>검사 기록의 </a:t>
-            </a:r>
-            <a:r>
-              <a:rPr sz="1200" b="1" i="0">
-                <a:solidFill>
-                  <a:srgbClr val="1F2A44"/>
-                </a:solidFill>
-                <a:latin typeface="Pretendard"/>
-                <a:ea typeface="Pretendard"/>
-                <a:cs typeface="Pretendard"/>
-              </a:rPr>
-              <a:t>디지털 자산화</a:t>
-            </a:r>
-            <a:r>
-              <a:rPr sz="1200" b="0" i="0">
-                <a:solidFill>
-                  <a:srgbClr val="1F2A44"/>
-                </a:solidFill>
-                <a:latin typeface="Pretendard"/>
-                <a:ea typeface="Pretendard"/>
-                <a:cs typeface="Pretendard"/>
-              </a:rPr>
-              <a:t>: 선급 규칙(IACS UR W33 §8)의 보고 항목을 입력 필드 25개로 갖추고, 원문 불릿 25개(일반 13·RT 12) 기준 충족률 n/25를 표시. 입력한 항목은 PDF에 규칙 원문 항목명과 함께 적는다</a:t>
+              <a:t> 선급 규칙(IACS UR W33 §8)이 요구하는 보고 항목을 입력 칸 25개로 갖췄고, 원문 항목 25개(일반 13·RT 12) 가운데 몇 개를 채웠는지 화면에 보여 줍니다. 입력한 내용은 규칙 원문의 항목 이름과 함께 PDF에 적힙니다.</a:t>
             </a:r>
           </a:p>
           <a:p>
@@ -11792,7 +11788,7 @@
                 <a:ea typeface="Pretendard"/>
                 <a:cs typeface="Pretendard"/>
               </a:rPr>
-              <a:t>블록·용접부·종류·합격 여부·기간으로 조건 검색, CSV 반출 → 선주·선급 요청 시 </a:t>
+              <a:t>블록과 용접부, 결함 종류, 합격 여부, 기간으로 찾고 CSV로 내보냅니다. 선주나 선급이 물으면 </a:t>
             </a:r>
             <a:r>
               <a:rPr sz="1200" b="1" i="0">
@@ -11803,7 +11799,18 @@
                 <a:ea typeface="Pretendard"/>
                 <a:cs typeface="Pretendard"/>
               </a:rPr>
-              <a:t>서류 수색을 화면 조회로 대체</a:t>
+              <a:t>서류를 뒤지는 대신 화면에서 조회</a:t>
+            </a:r>
+            <a:r>
+              <a:rPr sz="1200" b="0" i="0">
+                <a:solidFill>
+                  <a:srgbClr val="1F2A44"/>
+                </a:solidFill>
+                <a:latin typeface="Pretendard"/>
+                <a:ea typeface="Pretendard"/>
+                <a:cs typeface="Pretendard"/>
+              </a:rPr>
+              <a:t>합니다.</a:t>
             </a:r>
           </a:p>
           <a:p>
@@ -11829,7 +11836,7 @@
                 <a:ea typeface="Pretendard"/>
                 <a:cs typeface="Pretendard"/>
               </a:rPr>
-              <a:t>2028.01 이후 건조계약 선박에 적용되는 IACS 개정 규칙[1]의 100mm 구간 판독을 이미 구현</a:t>
+              <a:t>2028.01.01 이후 계약한 배에 적용되는 IACS 개정 규칙[1]의 100mm 구간 판독을 이미 만들어 뒀습니다.</a:t>
             </a:r>
             <a:r>
               <a:rPr sz="1200" b="0" i="0">
@@ -11840,7 +11847,7 @@
                 <a:ea typeface="Pretendard"/>
                 <a:cs typeface="Pretendard"/>
               </a:rPr>
-              <a:t> — 결함 위치를 따라 100mm 구간을 옮겨가며 가장 나쁜 구간으로 판정(현재는 용접선이 가로로 놓인 필름 기준, 세로 필름 축 전환은 본선 과제 / 위치 정보가 없으면 사진 전체를 한 구간으로 합산해 더 엄격하게). 규칙이 바뀌기 전에 준비된 규칙 엔진</a:t>
+              <a:t> 결함 위치를 따라 100mm 구간을 옮겨 가며 가장 나쁜 구간으로 판정합니다. 지금은 용접선이 가로로 놓인 필름 기준이고, 세로 필름은 본선 과제입니다. 위치 정보가 없으면 사진 전체를 한 구간으로 보고 더 엄격하게 판정합니다.</a:t>
             </a:r>
           </a:p>
           <a:p>
@@ -11866,7 +11873,7 @@
                 <a:ea typeface="Pretendard"/>
                 <a:cs typeface="Pretendard"/>
               </a:rPr>
-              <a:t>도입 2경로: ① 검사업체의 생산성 도구 ② 조선소 품질부서가 보고서 표준화·기록 관리 용도로 도입 — 어느 쪽도 클라우드 반출 없이 사내 설치</a:t>
+              <a:t>도입 경로는 두 가지입니다. 검사업체가 생산성 도구로 쓰거나, 조선소 품질부서가 보고서 표준화와 기록 관리에 씁니다. 둘 다 클라우드로 자료를 내보내지 않고 사내에 설치합니다.</a:t>
             </a:r>
           </a:p>
         </p:txBody>
@@ -12016,7 +12023,7 @@
                 <a:ea typeface="Pretendard"/>
                 <a:cs typeface="Pretendard"/>
               </a:rPr>
-              <a:t>기준표는 데이터(JSON) — </a:t>
+              <a:t>기준표는 코드가 아니라 데이터 파일입니다. </a:t>
             </a:r>
             <a:r>
               <a:rPr sz="1200" b="1" i="0">
@@ -12027,7 +12034,7 @@
                 <a:ea typeface="Pretendard"/>
                 <a:cs typeface="Pretendard"/>
               </a:rPr>
-              <a:t>판정식 3종 구조 안에서는 수치 교체만으로 전환</a:t>
+              <a:t>판정식 세 가지 안에서는 수치만 바꿔 끼우면 되고</a:t>
             </a:r>
             <a:r>
               <a:rPr sz="1200" b="0" i="0">
@@ -12038,7 +12045,7 @@
                 <a:ea typeface="Pretendard"/>
                 <a:cs typeface="Pretendard"/>
               </a:rPr>
-              <a:t>(규칙 엔진 코드 무변경), 규격 판본별 JSON을 화면에서 선택</a:t>
+              <a:t>, 규격 판본별 파일을 화면에서 고릅니다.</a:t>
             </a:r>
           </a:p>
           <a:p>
@@ -12075,7 +12082,7 @@
                 <a:ea typeface="Pretendard"/>
                 <a:cs typeface="Pretendard"/>
               </a:rPr>
-              <a:t>도 같은 처리 흐름 — IACS UR W34 적용 선박(2021.07 이후 건조계약)의 검사 흐름에 편입. 단, 지금은 일반 사진 파일(8비트 PNG·JPG)만 받고, 디지털 RT 장비의 원본 파일(12·16비트 TIFF — 밝기 단계가 더 촘촘해 미세 결함이 잘 보인다)은 본선 과제</a:t>
+              <a:t>도 같은 방법으로 처리합니다. 2021.07.01 이후 계약한 배의 검사 흐름에 그대로 들어갑니다. 다만 지금은 일반 사진 파일(8비트 PNG·JPG)만 받고, 밝기 단계가 더 촘촘한 장비 원본 파일(12·16비트 TIFF)은 본선 과제입니다.</a:t>
             </a:r>
           </a:p>
           <a:p>
@@ -12101,7 +12108,7 @@
                 <a:ea typeface="Pretendard"/>
                 <a:cs typeface="Pretendard"/>
               </a:rPr>
-              <a:t>KR도 2026.06 AI 기반 디지털 선급 협력에 착수했다(비파괴검사에 한정된 협력은 아님)[4]. 초음파(UT) 판독은 사진이 아닌 신호를 다루므로 범위 밖</a:t>
+              <a:t>KR도 2026.06 AI 기반 디지털 선급 협력을 시작했습니다[4]. 비파괴검사에만 한정된 협력은 아닙니다. 초음파 판독은 사진이 아니라 신호를 다루므로 범위 밖입니다.</a:t>
             </a:r>
           </a:p>
           <a:p>
@@ -12127,7 +12134,7 @@
                 <a:ea typeface="Pretendard"/>
                 <a:cs typeface="Pretendard"/>
               </a:rPr>
-              <a:t>발전 플랜트 배관·튜브 등 </a:t>
+              <a:t>발전 플랜트 배관처럼 </a:t>
             </a:r>
             <a:r>
               <a:rPr sz="1200" b="1" i="0">
@@ -12138,7 +12145,7 @@
                 <a:ea typeface="Pretendard"/>
                 <a:cs typeface="Pretendard"/>
               </a:rPr>
-              <a:t>RT 판독 직군 공통</a:t>
+              <a:t>RT를 판독하는 곳이면 문제가 같습니다</a:t>
             </a:r>
             <a:r>
               <a:rPr sz="1200" b="0" i="0">
@@ -12149,7 +12156,7 @@
                 <a:ea typeface="Pretendard"/>
                 <a:cs typeface="Pretendard"/>
               </a:rPr>
-              <a:t> 문제(두산에너빌리티 사례) → 타 산업 전개</a:t>
+              <a:t>. 두산에너빌리티 사례가 그 근거이고, 다른 산업으로 넓힐 수 있습니다.</a:t>
             </a:r>
           </a:p>
           <a:p>
@@ -12175,7 +12182,7 @@
                 <a:ea typeface="Pretendard"/>
                 <a:cs typeface="Pretendard"/>
               </a:rPr>
-              <a:t>로드맵: 조선소 현장 파일럿, 재학습 파이프라인(라벨 검수 대기열 포함), DNV-RP-0671(2023.09) 같은 AI 신뢰성 검증 지침에 따른 문서화[5], 설치형 패키징</a:t>
+              <a:t>앞으로는 조선소 현장 시범 적용, 재학습 자동화, DNV-RP-0671 같은 AI 신뢰성 지침에 맞춘 문서화[5], 설치형 패키징을 하겠습니다.</a:t>
             </a:r>
           </a:p>
         </p:txBody>
@@ -12245,7 +12252,7 @@
                 <a:ea typeface="Pretendard"/>
                 <a:cs typeface="Pretendard"/>
               </a:rPr>
-              <a:t>정량 지표 — 효과(측정 설계)와 검증(현재 수치)을 구분</a:t>
+              <a:t>정량 지표 · 효과는 재는 방법을, 검증은 지금 수치를 적었습니다</a:t>
             </a:r>
           </a:p>
         </p:txBody>
@@ -12358,7 +12365,7 @@
                 <a:ea typeface="Pretendard"/>
                 <a:cs typeface="Pretendard"/>
               </a:rPr>
-              <a:t>실측 설계</a:t>
+              <a:t>직접 측정</a:t>
             </a:r>
           </a:p>
         </p:txBody>
@@ -12399,7 +12406,7 @@
                 <a:ea typeface="Pretendard"/>
                 <a:cs typeface="Pretendard"/>
               </a:rPr>
-              <a:t>앱이 사진 열기→승인 소요시간을 자동 기록(구현 완료). 수기 기준선은 현직 판독원 확인 후 비교 — 미확정 수치는 기재하지 않음</a:t>
+              <a:t>앱이 사진을 연 순간부터 승인까지 걸린 시간을 자동으로 기록합니다. 손으로 하던 시간은 현직 판독원에게 확인한 뒤 비교합니다. 확인 전 수치는 적지 않습니다.</a:t>
             </a:r>
           </a:p>
         </p:txBody>
@@ -12471,7 +12478,7 @@
                 <a:ea typeface="Pretendard"/>
                 <a:cs typeface="Pretendard"/>
               </a:rPr>
-              <a:t>효과② 기록 검색 시간</a:t>
+              <a:t>효과② 기록 찾는 시간</a:t>
             </a:r>
           </a:p>
         </p:txBody>
@@ -12512,7 +12519,7 @@
                 <a:ea typeface="Pretendard"/>
                 <a:cs typeface="Pretendard"/>
               </a:rPr>
-              <a:t>수색 → 조회</a:t>
+              <a:t>뒤지기에서 조회로</a:t>
             </a:r>
           </a:p>
         </p:txBody>
@@ -12553,7 +12560,7 @@
                 <a:ea typeface="Pretendard"/>
                 <a:cs typeface="Pretendard"/>
               </a:rPr>
-              <a:t>블록·용접부·종류·합격 여부·기간 조건 검색과 말로 검색·요약. 목표: 과거 기록 조회를 서류 수색에서 화면 조회로 — 시연에서 실측</a:t>
+              <a:t>블록과 용접부, 결함 종류, 합격 여부, 기간으로 찾고 말로도 찾습니다. 서류를 뒤지던 일을 화면 조회로 바꾸는 것이 목표이고, 시연에서 직접 재겠습니다.</a:t>
             </a:r>
           </a:p>
         </p:txBody>
@@ -12625,7 +12632,7 @@
                 <a:ea typeface="Pretendard"/>
                 <a:cs typeface="Pretendard"/>
               </a:rPr>
-              <a:t>검증① 2차 눈 성능</a:t>
+              <a:t>검증① 두 번째 눈 성능</a:t>
             </a:r>
           </a:p>
         </p:txBody>
@@ -12666,7 +12673,7 @@
                 <a:ea typeface="Pretendard"/>
                 <a:cs typeface="Pretendard"/>
               </a:rPr>
-              <a:t>검출률 ≥ 95%</a:t>
+              <a:t>검출률 95% 이상</a:t>
             </a:r>
           </a:p>
         </p:txBody>
@@ -12707,7 +12714,7 @@
                 <a:ea typeface="Pretendard"/>
                 <a:cs typeface="Pretendard"/>
               </a:rPr>
-              <a:t>실제로 쓸 신뢰도 기준에서 검출률·장당 오탐을 함께 공개(AI Hub RT 테스트셋 + GDXray 교차). 현재 폴백 탐지기: 합성 필름 결함 14개 중 14개 탐지, 장당 오탐 3.8건(신뢰도 기준 0.5·느슨한 매칭)</a:t>
+              <a:t>실제로 쓸 신뢰도 기준에서 검출률과 장당 헛짚음을 함께 공개합니다. 지금 대체 탐지기는 합성 필름의 결함 14개를 모두 찾았고 장당 헛짚음은 3.8건입니다.</a:t>
             </a:r>
           </a:p>
         </p:txBody>
@@ -12861,7 +12868,7 @@
                 <a:ea typeface="Pretendard"/>
                 <a:cs typeface="Pretendard"/>
               </a:rPr>
-              <a:t>자동 테스트 281건 · 합성 필름 전 과정 자동 검증 · 판정 3종·PDF·DB·라벨 내보내기 회귀 테스트. 운영 시 채택률·미탐(직접 추가) 건수 자동 집계</a:t>
+              <a:t>자동 테스트 281건을 돌리고, 합성 필름으로 전 과정을 점검합니다. 판정 3종과 PDF, 기록, 라벨 내보내기를 매번 다시 확인합니다. 실제로 쓰기 시작하면 채택률과 놓친 건수를 자동으로 셉니다.</a:t>
             </a:r>
           </a:p>
         </p:txBody>
@@ -12902,7 +12909,7 @@
                 <a:ea typeface="Pretendard"/>
                 <a:cs typeface="Pretendard"/>
               </a:rPr>
-              <a:t>판정 항목마다 허용 한계·근거 조항 번호와 </a:t>
+              <a:t>판정 항목마다 허용 한계와 근거 조항 번호, </a:t>
             </a:r>
             <a:r>
               <a:rPr sz="1200" b="1" i="0">
@@ -12913,7 +12920,7 @@
                 <a:ea typeface="Pretendard"/>
                 <a:cs typeface="Pretendard"/>
               </a:rPr>
-              <a:t>적용 기준표 이름·판본</a:t>
+              <a:t>적용한 기준표 이름과 판본</a:t>
             </a:r>
             <a:r>
               <a:rPr sz="1200" b="0" i="0">
@@ -12924,7 +12931,7 @@
                 <a:ea typeface="Pretendard"/>
                 <a:cs typeface="Pretendard"/>
               </a:rPr>
-              <a:t>이 판정표·PDF·기록에 자동 기재되고, 판본을 바꾸면 재판정이 강제된다 → 판정 근거 누락을 구조적으로 방지(현재는 데모 기준표)</a:t>
+              <a:t>이 판정표와 PDF, 기록에 자동으로 적힙니다. 판본을 바꾸면 다시 판정하게 되어 있어, 근거가 빠질 수 없습니다. 지금 들어 있는 기준표는 데모용입니다.</a:t>
             </a:r>
           </a:p>
         </p:txBody>
@@ -12965,7 +12972,7 @@
                 <a:ea typeface="Pretendard"/>
                 <a:cs typeface="Pretendard"/>
               </a:rPr>
-              <a:t>참고  [1] IACS UR W33 Rev.2·W34 Rev.1(2026.07.15 승인, 2028.01.01 이후 건조계약분; 100mm 평가 길이 자체는 현행 ISO 10675-1 기준)  ·  [2] 두산에너빌리티 2026.03 전시 인터뷰†  ·  [3] 가스신문 2025.09.18†  ·  [4] KR×Microsoft AI 협력 보도(2026.06)†  ·  [5] DNV-RP-0671(2023.09)†  ·  효과 지표는 측정 설계이며 확정 수치 아님  ·  † 검색 요약 기준</a:t>
+              <a:t>참고  [1] IACS UR W33 Rev.2·W34 Rev.1(2026.07.15 승인, 2028.01.01 이후 건조계약분. 100mm 평가 길이 자체는 현행 ISO 10675-1 기준)  ·  [2] 두산에너빌리티 2026.03 전시 인터뷰†  ·  [3] 가스신문 2025.09.18†  ·  [4] KR×Microsoft AI 협력 보도(2026.06)†  ·  [5] DNV-RP-0671(2023.09)†  ·  효과 지표는 재는 방법이며 확정된 수치가 아닙니다  ·  †는 검색 요약으로 확인한 자료입니다.</a:t>
             </a:r>
           </a:p>
         </p:txBody>
